--- a/docs/MCP-DevSummit-Toronto-Kaan-Turgut.pptx
+++ b/docs/MCP-DevSummit-Toronto-Kaan-Turgut.pptx
@@ -36,7 +36,7 @@
       <p:boldItalic r:id="rId22"/>
     </p:embeddedFont>
     <p:embeddedFont>
-      <p:font typeface="Red Hat Display Medium" panose="02010303040201060303" pitchFamily="2" charset="0"/>
+      <p:font typeface="Red Hat Display Medium" panose="02010303040201060303"/>
       <p:regular r:id="rId23"/>
       <p:bold r:id="rId24"/>
       <p:italic r:id="rId25"/>
@@ -288,7 +288,7 @@
       </p15:sldGuideLst>
     </p:ext>
     <p:ext uri="GoogleSlidesCustomDataVersion2">
-      <go:slidesCustomData xmlns:go="http://customooxmlschemas.google.com/" xmlns:ahyp="http://schemas.microsoft.com/office/drawing/2018/hyperlinkcolor" xmlns:p15="http://schemas.microsoft.com/office/powerpoint/2012/main" xmlns:p14="http://schemas.microsoft.com/office/powerpoint/2010/main" xmlns:com="http://schemas.openxmlformats.org/drawingml/2006/compatibility" xmlns:pvml="urn:schemas-microsoft-com:office:powerpoint" xmlns:v="urn:schemas-microsoft-com:vml" xmlns:o="urn:schemas-microsoft-com:office:office" xmlns:dgm="http://schemas.openxmlformats.org/drawingml/2006/diagram" xmlns:c="http://schemas.openxmlformats.org/drawingml/2006/chart" xmlns:mv="urn:schemas-microsoft-com:mac:vml" xmlns:mc="http://schemas.openxmlformats.org/markup-compatibility/2006" xmlns="" r:id="rId27" roundtripDataSignature="AMtx7mjw4CcD1I3OFt5p9O1SWAb3pcI7QA=="/>
+      <go:slidesCustomData xmlns="" xmlns:mc="http://schemas.openxmlformats.org/markup-compatibility/2006" xmlns:mv="urn:schemas-microsoft-com:mac:vml" xmlns:c="http://schemas.openxmlformats.org/drawingml/2006/chart" xmlns:dgm="http://schemas.openxmlformats.org/drawingml/2006/diagram" xmlns:o="urn:schemas-microsoft-com:office:office" xmlns:v="urn:schemas-microsoft-com:vml" xmlns:pvml="urn:schemas-microsoft-com:office:powerpoint" xmlns:com="http://schemas.openxmlformats.org/drawingml/2006/compatibility" xmlns:p14="http://schemas.microsoft.com/office/powerpoint/2010/main" xmlns:p15="http://schemas.microsoft.com/office/powerpoint/2012/main" xmlns:ahyp="http://schemas.microsoft.com/office/drawing/2018/hyperlinkcolor" xmlns:go="http://customooxmlschemas.google.com/" r:id="rId27" roundtripDataSignature="AMtx7mjw4CcD1I3OFt5p9O1SWAb3pcI7QA=="/>
     </p:ext>
   </p:extLst>
 </p:presentation>
@@ -1427,7 +1427,12 @@
             <p:ph type="sldImg" idx="2"/>
           </p:nvPr>
         </p:nvSpPr>
-        <p:spPr/>
+        <p:spPr>
+          <a:xfrm>
+            <a:off x="381000" y="685800"/>
+            <a:ext cx="6096000" cy="3429000"/>
+          </a:xfrm>
+        </p:spPr>
       </p:sp>
       <p:sp>
         <p:nvSpPr>
@@ -14746,6 +14751,7 @@
           <a:lstStyle/>
           <a:p>
             <a:r>
+              <a:rPr dirty="0"/>
               <a:t>About me</a:t>
             </a:r>
           </a:p>
@@ -15061,7 +15067,7 @@
               </a:spcAft>
             </a:pPr>
             <a:r>
-              <a:rPr sz="1400" b="1" i="0">
+              <a:rPr sz="1400" b="1" i="0" dirty="0">
                 <a:solidFill>
                   <a:srgbClr val="051832"/>
                 </a:solidFill>
@@ -15088,7 +15094,7 @@
         </p:blipFill>
         <p:spPr>
           <a:xfrm>
-            <a:off x="3520440" y="1188720"/>
+            <a:off x="3374136" y="1414981"/>
             <a:ext cx="2240280" cy="2240280"/>
           </a:xfrm>
           <a:prstGeom prst="rect">
@@ -15104,7 +15110,7 @@
         </p:nvSpPr>
         <p:spPr>
           <a:xfrm>
-            <a:off x="5989320" y="1188720"/>
+            <a:off x="5989320" y="1865972"/>
             <a:ext cx="2697480" cy="384048"/>
           </a:xfrm>
           <a:prstGeom prst="rect">
@@ -15143,7 +15149,7 @@
         </p:nvSpPr>
         <p:spPr>
           <a:xfrm>
-            <a:off x="5989320" y="1645920"/>
+            <a:off x="5989320" y="2323172"/>
             <a:ext cx="2697480" cy="658368"/>
           </a:xfrm>
           <a:prstGeom prst="roundRect">
@@ -15189,7 +15195,7 @@
         </p:nvSpPr>
         <p:spPr>
           <a:xfrm>
-            <a:off x="6144768" y="1645920"/>
+            <a:off x="6144768" y="2323172"/>
             <a:ext cx="2468880" cy="658368"/>
           </a:xfrm>
           <a:prstGeom prst="rect">
@@ -15209,7 +15215,7 @@
               </a:spcAft>
             </a:pPr>
             <a:r>
-              <a:rPr sz="1500" b="1" i="0">
+              <a:rPr sz="1500" b="1" i="0" dirty="0">
                 <a:solidFill>
                   <a:srgbClr val="01B1EA"/>
                 </a:solidFill>
@@ -15225,7 +15231,7 @@
               </a:spcAft>
             </a:pPr>
             <a:r>
-              <a:rPr sz="1050" b="1" i="0">
+              <a:rPr sz="1050" b="1" i="0" dirty="0">
                 <a:solidFill>
                   <a:srgbClr val="FFFFFF"/>
                 </a:solidFill>
@@ -15244,8 +15250,8 @@
         </p:nvSpPr>
         <p:spPr>
           <a:xfrm>
-            <a:off x="5989320" y="2423160"/>
-            <a:ext cx="1143000" cy="1143000"/>
+            <a:off x="7955280" y="35770"/>
+            <a:ext cx="1014984" cy="951121"/>
           </a:xfrm>
           <a:prstGeom prst="roundRect">
             <a:avLst>
@@ -15300,69 +15306,14 @@
         </p:blipFill>
         <p:spPr>
           <a:xfrm>
-            <a:off x="6053328" y="2487168"/>
-            <a:ext cx="1014984" cy="1014984"/>
+            <a:off x="7987211" y="48388"/>
+            <a:ext cx="951122" cy="951122"/>
           </a:xfrm>
           <a:prstGeom prst="rect">
             <a:avLst/>
           </a:prstGeom>
         </p:spPr>
       </p:pic>
-      <p:sp>
-        <p:nvSpPr>
-          <p:cNvPr id="18" name="TextBox 17"/>
-          <p:cNvSpPr txBox="1"/>
-          <p:nvPr/>
-        </p:nvSpPr>
-        <p:spPr>
-          <a:xfrm>
-            <a:off x="7269480" y="2697480"/>
-            <a:ext cx="1371600" cy="640080"/>
-          </a:xfrm>
-          <a:prstGeom prst="rect">
-            <a:avLst/>
-          </a:prstGeom>
-          <a:noFill/>
-        </p:spPr>
-        <p:txBody>
-          <a:bodyPr wrap="square" lIns="0" tIns="0" rIns="0" bIns="0" anchor="t">
-            <a:spAutoFit/>
-          </a:bodyPr>
-          <a:lstStyle/>
-          <a:p>
-            <a:pPr algn="l">
-              <a:spcAft>
-                <a:spcPts val="400"/>
-              </a:spcAft>
-            </a:pPr>
-            <a:r>
-              <a:rPr sz="1300" b="1" i="0">
-                <a:solidFill>
-                  <a:srgbClr val="051832"/>
-                </a:solidFill>
-                <a:latin typeface="Arial"/>
-              </a:rPr>
-              <a:t>Connect</a:t>
-            </a:r>
-          </a:p>
-          <a:p>
-            <a:pPr algn="l">
-              <a:spcAft>
-                <a:spcPts val="400"/>
-              </a:spcAft>
-            </a:pPr>
-            <a:r>
-              <a:rPr sz="1200" b="0" i="0">
-                <a:solidFill>
-                  <a:srgbClr val="56657A"/>
-                </a:solidFill>
-                <a:latin typeface="Arial"/>
-              </a:rPr>
-              <a:t>on LinkedIn</a:t>
-            </a:r>
-          </a:p>
-        </p:txBody>
-      </p:sp>
       <p:sp>
         <p:nvSpPr>
           <p:cNvPr id="19" name="Rounded Rectangle 18"/>
@@ -15371,7 +15322,7 @@
         </p:nvSpPr>
         <p:spPr>
           <a:xfrm>
-            <a:off x="457200" y="3657600"/>
+            <a:off x="457200" y="3954795"/>
             <a:ext cx="8229600" cy="566928"/>
           </a:xfrm>
           <a:prstGeom prst="roundRect">
@@ -15425,7 +15376,7 @@
         </p:blipFill>
         <p:spPr>
           <a:xfrm>
-            <a:off x="685800" y="3794760"/>
+            <a:off x="685800" y="4091955"/>
             <a:ext cx="292608" cy="292608"/>
           </a:xfrm>
           <a:prstGeom prst="rect">
@@ -15441,8 +15392,8 @@
         </p:nvSpPr>
         <p:spPr>
           <a:xfrm>
-            <a:off x="1069848" y="3657600"/>
-            <a:ext cx="1645920" cy="566928"/>
+            <a:off x="1069848" y="4153620"/>
+            <a:ext cx="1645920" cy="169277"/>
           </a:xfrm>
           <a:prstGeom prst="rect">
             <a:avLst/>
@@ -15461,23 +15412,29 @@
               </a:spcAft>
             </a:pPr>
             <a:r>
-              <a:rPr sz="1100" b="0" i="0">
-                <a:solidFill>
-                  <a:srgbClr val="56657A"/>
+              <a:rPr sz="1100" b="1" i="0" dirty="0">
+                <a:solidFill>
+                  <a:srgbClr val="051832"/>
                 </a:solidFill>
                 <a:latin typeface="Arial"/>
               </a:rPr>
-              <a:t>LinkedIn  </a:t>
-            </a:r>
-            <a:r>
-              <a:rPr sz="1100" b="1" i="0">
+              <a:t>@</a:t>
+            </a:r>
+            <a:r>
+              <a:rPr sz="1100" b="1" i="0" dirty="0" err="1">
                 <a:solidFill>
                   <a:srgbClr val="051832"/>
                 </a:solidFill>
                 <a:latin typeface="Arial"/>
               </a:rPr>
-              <a:t>@hkaanturgut</a:t>
-            </a:r>
+              <a:t>hkaanturgut</a:t>
+            </a:r>
+            <a:endParaRPr sz="1100" b="1" i="0" dirty="0">
+              <a:solidFill>
+                <a:srgbClr val="051832"/>
+              </a:solidFill>
+              <a:latin typeface="Arial"/>
+            </a:endParaRPr>
           </a:p>
         </p:txBody>
       </p:sp>
@@ -15497,7 +15454,7 @@
         </p:blipFill>
         <p:spPr>
           <a:xfrm>
-            <a:off x="2743200" y="3794760"/>
+            <a:off x="2743200" y="4091955"/>
             <a:ext cx="292608" cy="292608"/>
           </a:xfrm>
           <a:prstGeom prst="rect">
@@ -15513,8 +15470,8 @@
         </p:nvSpPr>
         <p:spPr>
           <a:xfrm>
-            <a:off x="3127248" y="3657600"/>
-            <a:ext cx="1645920" cy="566928"/>
+            <a:off x="3127248" y="4153620"/>
+            <a:ext cx="1645920" cy="169277"/>
           </a:xfrm>
           <a:prstGeom prst="rect">
             <a:avLst/>
@@ -15533,23 +15490,29 @@
               </a:spcAft>
             </a:pPr>
             <a:r>
-              <a:rPr sz="1100" b="0" i="0">
-                <a:solidFill>
-                  <a:srgbClr val="56657A"/>
+              <a:rPr sz="1100" b="1" i="0" dirty="0">
+                <a:solidFill>
+                  <a:srgbClr val="051832"/>
                 </a:solidFill>
                 <a:latin typeface="Arial"/>
               </a:rPr>
-              <a:t>GitHub  </a:t>
-            </a:r>
-            <a:r>
-              <a:rPr sz="1100" b="1" i="0">
+              <a:t>@</a:t>
+            </a:r>
+            <a:r>
+              <a:rPr sz="1100" b="1" i="0" dirty="0" err="1">
                 <a:solidFill>
                   <a:srgbClr val="051832"/>
                 </a:solidFill>
                 <a:latin typeface="Arial"/>
               </a:rPr>
-              <a:t>@hkaanturgut</a:t>
-            </a:r>
+              <a:t>hkaanturgut</a:t>
+            </a:r>
+            <a:endParaRPr sz="1100" b="1" i="0" dirty="0">
+              <a:solidFill>
+                <a:srgbClr val="051832"/>
+              </a:solidFill>
+              <a:latin typeface="Arial"/>
+            </a:endParaRPr>
           </a:p>
         </p:txBody>
       </p:sp>
@@ -15569,7 +15532,7 @@
         </p:blipFill>
         <p:spPr>
           <a:xfrm>
-            <a:off x="4800600" y="3794760"/>
+            <a:off x="4800600" y="4091955"/>
             <a:ext cx="292608" cy="292608"/>
           </a:xfrm>
           <a:prstGeom prst="rect">
@@ -15585,8 +15548,8 @@
         </p:nvSpPr>
         <p:spPr>
           <a:xfrm>
-            <a:off x="5184648" y="3657600"/>
-            <a:ext cx="1645920" cy="566928"/>
+            <a:off x="5184648" y="4153620"/>
+            <a:ext cx="1645920" cy="169277"/>
           </a:xfrm>
           <a:prstGeom prst="rect">
             <a:avLst/>
@@ -15605,23 +15568,29 @@
               </a:spcAft>
             </a:pPr>
             <a:r>
-              <a:rPr sz="1100" b="0" i="0">
-                <a:solidFill>
-                  <a:srgbClr val="56657A"/>
+              <a:rPr sz="1100" b="1" i="0" dirty="0">
+                <a:solidFill>
+                  <a:srgbClr val="051832"/>
                 </a:solidFill>
                 <a:latin typeface="Arial"/>
               </a:rPr>
-              <a:t>YouTube  </a:t>
-            </a:r>
-            <a:r>
-              <a:rPr sz="1100" b="1" i="0">
+              <a:t>@</a:t>
+            </a:r>
+            <a:r>
+              <a:rPr sz="1100" b="1" i="0" dirty="0" err="1">
                 <a:solidFill>
                   <a:srgbClr val="051832"/>
                 </a:solidFill>
                 <a:latin typeface="Arial"/>
               </a:rPr>
-              <a:t>@hkaanturgut</a:t>
-            </a:r>
+              <a:t>hkaanturgut</a:t>
+            </a:r>
+            <a:endParaRPr sz="1100" b="1" i="0" dirty="0">
+              <a:solidFill>
+                <a:srgbClr val="051832"/>
+              </a:solidFill>
+              <a:latin typeface="Arial"/>
+            </a:endParaRPr>
           </a:p>
         </p:txBody>
       </p:sp>
@@ -15641,7 +15610,7 @@
         </p:blipFill>
         <p:spPr>
           <a:xfrm>
-            <a:off x="6858000" y="3794760"/>
+            <a:off x="6858000" y="4091955"/>
             <a:ext cx="292608" cy="292608"/>
           </a:xfrm>
           <a:prstGeom prst="rect">
@@ -15657,8 +15626,8 @@
         </p:nvSpPr>
         <p:spPr>
           <a:xfrm>
-            <a:off x="7242048" y="3657600"/>
-            <a:ext cx="1645920" cy="566928"/>
+            <a:off x="7132320" y="4153620"/>
+            <a:ext cx="1645920" cy="169277"/>
           </a:xfrm>
           <a:prstGeom prst="rect">
             <a:avLst/>
@@ -15677,23 +15646,38 @@
               </a:spcAft>
             </a:pPr>
             <a:r>
-              <a:rPr sz="1100" b="0" i="0">
+              <a:rPr sz="1100" b="0" i="0" dirty="0">
                 <a:solidFill>
                   <a:srgbClr val="56657A"/>
                 </a:solidFill>
                 <a:latin typeface="Arial"/>
               </a:rPr>
-              <a:t>X  </a:t>
-            </a:r>
-            <a:r>
-              <a:rPr sz="1100" b="1" i="0">
+              <a:t>  </a:t>
+            </a:r>
+            <a:r>
+              <a:rPr sz="1100" b="1" i="0" dirty="0">
                 <a:solidFill>
                   <a:srgbClr val="051832"/>
                 </a:solidFill>
                 <a:latin typeface="Arial"/>
               </a:rPr>
-              <a:t>@hkaanturgut</a:t>
-            </a:r>
+              <a:t>@</a:t>
+            </a:r>
+            <a:r>
+              <a:rPr sz="1100" b="1" i="0" dirty="0" err="1">
+                <a:solidFill>
+                  <a:srgbClr val="051832"/>
+                </a:solidFill>
+                <a:latin typeface="Arial"/>
+              </a:rPr>
+              <a:t>hkaanturgut</a:t>
+            </a:r>
+            <a:endParaRPr sz="1100" b="1" i="0" dirty="0">
+              <a:solidFill>
+                <a:srgbClr val="051832"/>
+              </a:solidFill>
+              <a:latin typeface="Arial"/>
+            </a:endParaRPr>
           </a:p>
         </p:txBody>
       </p:sp>

--- a/docs/MCP-DevSummit-Toronto-Kaan-Turgut.pptx
+++ b/docs/MCP-DevSummit-Toronto-Kaan-Turgut.pptx
@@ -1624,7 +1624,7 @@
           <a:lstStyle/>
           <a:p>
             <a:r>
-              <a:t>+3. Why not hand the agent the REST API directly? Walk the rows: discovery at runtime instead of docs pasted into every app; only the fields the model needs instead of everything; the caller's identity instead of one shared key; rules in code instead of the prompt; a human for risky actions. Then be honest about when not to: one app of yours calling one API is fine with plain function calling. MCP pays off with several hosts, different permissions per caller, or when you must prove who did what.</a:t>
+              <a:t>+3. Why not let every agent call every API? Left: three agents, five systems. Every agent needs its own integration, credentials and rules for every system: 15 links to build, secure and keep in sync. Spin up a new agent (the red one) and you rebuild all five. Right: each agent connects once, to MCP; MCP connects once to each system. 8 links, and auth, policy and audit live in one place, so a new agent is one connection. Accuracy note if asked: usually that's one MCP server per system behind a single gateway or endpoint; the point is the agent side stays one standard connection. Then be honest about when not to: one app of yours calling one API is fine with plain function calling.</a:t>
             </a:r>
           </a:p>
         </p:txBody>
@@ -17504,535 +17504,1438 @@
           <a:lstStyle/>
           <a:p>
             <a:r>
-              <a:t>Why not let the agent call the API?</a:t>
-            </a:r>
-          </a:p>
-        </p:txBody>
-      </p:sp>
-      <p:graphicFrame>
-        <p:nvGraphicFramePr>
-          <p:cNvPr id="11" name="Table 11"/>
-          <p:cNvGraphicFramePr>
-            <a:graphicFrameLocks noGrp="1"/>
-          </p:cNvGraphicFramePr>
-          <p:nvPr/>
-        </p:nvGraphicFramePr>
-        <p:xfrm>
-          <a:off x="457200" y="1325880"/>
-          <a:ext cx="5486400" cy="2523744"/>
-        </p:xfrm>
-        <a:graphic>
-          <a:graphicData uri="http://schemas.openxmlformats.org/drawingml/2006/table">
-            <a:tbl>
-              <a:tblPr>
-                <a:tableStyleId>{5C22544A-7EE6-4342-B048-85BDC9FD1C3A}</a:tableStyleId>
-              </a:tblPr>
-              <a:tblGrid>
-                <a:gridCol w="1097280">
-                  <a:extLst>
-                    <a:ext uri="{9D8B030D-6E8A-4147-A177-3AD203B41FA5}">
-                      <a16:colId xmlns:a16="http://schemas.microsoft.com/office/drawing/2014/main" val="20000"/>
-                    </a:ext>
-                  </a:extLst>
-                </a:gridCol>
-                <a:gridCol w="2194560">
-                  <a:extLst>
-                    <a:ext uri="{9D8B030D-6E8A-4147-A177-3AD203B41FA5}">
-                      <a16:colId xmlns:a16="http://schemas.microsoft.com/office/drawing/2014/main" val="20001"/>
-                    </a:ext>
-                  </a:extLst>
-                </a:gridCol>
-                <a:gridCol w="2194560">
-                  <a:extLst>
-                    <a:ext uri="{9D8B030D-6E8A-4147-A177-3AD203B41FA5}">
-                      <a16:colId xmlns:a16="http://schemas.microsoft.com/office/drawing/2014/main" val="20002"/>
-                    </a:ext>
-                  </a:extLst>
-                </a:gridCol>
-              </a:tblGrid>
-              <a:tr h="420624">
-                <a:tc>
-                  <a:txBody>
-                    <a:bodyPr/>
-                    <a:lstStyle/>
-                    <a:p>
-                      <a:pPr algn="l"/>
-                      <a:endParaRPr/>
-                    </a:p>
-                  </a:txBody>
-                  <a:tcPr marL="73152" marR="73152" marT="27432" marB="27432" anchor="ctr">
-                    <a:solidFill>
-                      <a:srgbClr val="051832"/>
-                    </a:solidFill>
-                  </a:tcPr>
-                </a:tc>
-                <a:tc>
-                  <a:txBody>
-                    <a:bodyPr/>
-                    <a:lstStyle/>
-                    <a:p>
-                      <a:pPr algn="l"/>
-                      <a:r>
-                        <a:rPr lang="en-US" sz="1100" b="1" i="0" dirty="0">
-                          <a:solidFill>
-                            <a:srgbClr val="FFFFFF"/>
-                          </a:solidFill>
-                          <a:latin typeface="Arial"/>
-                          <a:cs typeface="Arial"/>
-                        </a:rPr>
-                        <a:t>Agent calls the REST API</a:t>
-                      </a:r>
-                    </a:p>
-                  </a:txBody>
-                  <a:tcPr marL="73152" marR="73152" marT="27432" marB="27432" anchor="ctr">
-                    <a:solidFill>
-                      <a:srgbClr val="051832"/>
-                    </a:solidFill>
-                  </a:tcPr>
-                </a:tc>
-                <a:tc>
-                  <a:txBody>
-                    <a:bodyPr/>
-                    <a:lstStyle/>
-                    <a:p>
-                      <a:pPr algn="l"/>
-                      <a:r>
-                        <a:rPr lang="en-US" sz="1100" b="1" i="0" dirty="0">
-                          <a:solidFill>
-                            <a:srgbClr val="FFFFFF"/>
-                          </a:solidFill>
-                          <a:latin typeface="Arial"/>
-                          <a:cs typeface="Arial"/>
-                        </a:rPr>
-                        <a:t>Agent calls the MCP server</a:t>
-                      </a:r>
-                    </a:p>
-                  </a:txBody>
-                  <a:tcPr marL="73152" marR="73152" marT="27432" marB="27432" anchor="ctr">
-                    <a:solidFill>
-                      <a:srgbClr val="051832"/>
-                    </a:solidFill>
-                  </a:tcPr>
-                </a:tc>
-                <a:extLst>
-                  <a:ext uri="{0D108BD9-81ED-4DB2-BD59-A6C34878D82A}">
-                    <a16:rowId xmlns:a16="http://schemas.microsoft.com/office/drawing/2014/main" val="10000"/>
-                  </a:ext>
-                </a:extLst>
-              </a:tr>
-              <a:tr h="420624">
-                <a:tc>
-                  <a:txBody>
-                    <a:bodyPr/>
-                    <a:lstStyle/>
-                    <a:p>
-                      <a:pPr algn="l"/>
-                      <a:r>
-                        <a:rPr lang="en-US" sz="1100" b="1" i="0" dirty="0">
-                          <a:solidFill>
-                            <a:srgbClr val="0E1B2C"/>
-                          </a:solidFill>
-                          <a:latin typeface="Arial"/>
-                          <a:cs typeface="Arial"/>
-                        </a:rPr>
-                        <a:t>Discovery</a:t>
-                      </a:r>
-                    </a:p>
-                  </a:txBody>
-                  <a:tcPr marL="73152" marR="73152" marT="27432" marB="27432" anchor="ctr">
-                    <a:solidFill>
-                      <a:srgbClr val="FFFFFF"/>
-                    </a:solidFill>
-                  </a:tcPr>
-                </a:tc>
-                <a:tc>
-                  <a:txBody>
-                    <a:bodyPr/>
-                    <a:lstStyle/>
-                    <a:p>
-                      <a:pPr algn="l"/>
-                      <a:r>
-                        <a:rPr lang="en-US" sz="1100" b="0" i="0" dirty="0">
-                          <a:solidFill>
-                            <a:srgbClr val="0E1B2C"/>
-                          </a:solidFill>
-                          <a:latin typeface="Arial"/>
-                          <a:cs typeface="Arial"/>
-                        </a:rPr>
-                        <a:t>Docs pasted into each app</a:t>
-                      </a:r>
-                    </a:p>
-                  </a:txBody>
-                  <a:tcPr marL="73152" marR="73152" marT="27432" marB="27432" anchor="ctr">
-                    <a:solidFill>
-                      <a:srgbClr val="FFFFFF"/>
-                    </a:solidFill>
-                  </a:tcPr>
-                </a:tc>
-                <a:tc>
-                  <a:txBody>
-                    <a:bodyPr/>
-                    <a:lstStyle/>
-                    <a:p>
-                      <a:pPr algn="l"/>
-                      <a:r>
-                        <a:rPr lang="en-US" sz="1100" b="0" i="0" dirty="0">
-                          <a:solidFill>
-                            <a:srgbClr val="0E1B2C"/>
-                          </a:solidFill>
-                          <a:latin typeface="Arial"/>
-                          <a:cs typeface="Arial"/>
-                        </a:rPr>
-                        <a:t>tools/list with schemas, at runtime</a:t>
-                      </a:r>
-                    </a:p>
-                  </a:txBody>
-                  <a:tcPr marL="73152" marR="73152" marT="27432" marB="27432" anchor="ctr">
-                    <a:solidFill>
-                      <a:srgbClr val="FFFFFF"/>
-                    </a:solidFill>
-                  </a:tcPr>
-                </a:tc>
-                <a:extLst>
-                  <a:ext uri="{0D108BD9-81ED-4DB2-BD59-A6C34878D82A}">
-                    <a16:rowId xmlns:a16="http://schemas.microsoft.com/office/drawing/2014/main" val="10001"/>
-                  </a:ext>
-                </a:extLst>
-              </a:tr>
-              <a:tr h="420624">
-                <a:tc>
-                  <a:txBody>
-                    <a:bodyPr/>
-                    <a:lstStyle/>
-                    <a:p>
-                      <a:pPr algn="l"/>
-                      <a:r>
-                        <a:rPr lang="en-US" sz="1100" b="1" i="0" dirty="0">
-                          <a:solidFill>
-                            <a:srgbClr val="0E1B2C"/>
-                          </a:solidFill>
-                          <a:latin typeface="Arial"/>
-                          <a:cs typeface="Arial"/>
-                        </a:rPr>
-                        <a:t>Data</a:t>
-                      </a:r>
-                    </a:p>
-                  </a:txBody>
-                  <a:tcPr marL="73152" marR="73152" marT="27432" marB="27432" anchor="ctr">
-                    <a:solidFill>
-                      <a:srgbClr val="EEF4F9"/>
-                    </a:solidFill>
-                  </a:tcPr>
-                </a:tc>
-                <a:tc>
-                  <a:txBody>
-                    <a:bodyPr/>
-                    <a:lstStyle/>
-                    <a:p>
-                      <a:pPr algn="l"/>
-                      <a:r>
-                        <a:rPr lang="en-US" sz="1100" b="0" i="0" dirty="0">
-                          <a:solidFill>
-                            <a:srgbClr val="0E1B2C"/>
-                          </a:solidFill>
-                          <a:latin typeface="Arial"/>
-                          <a:cs typeface="Arial"/>
-                        </a:rPr>
-                        <a:t>Every field: VIN, prices before fees</a:t>
-                      </a:r>
-                    </a:p>
-                  </a:txBody>
-                  <a:tcPr marL="73152" marR="73152" marT="27432" marB="27432" anchor="ctr">
-                    <a:solidFill>
-                      <a:srgbClr val="EEF4F9"/>
-                    </a:solidFill>
-                  </a:tcPr>
-                </a:tc>
-                <a:tc>
-                  <a:txBody>
-                    <a:bodyPr/>
-                    <a:lstStyle/>
-                    <a:p>
-                      <a:pPr algn="l"/>
-                      <a:r>
-                        <a:rPr lang="en-US" sz="1100" b="0" i="0" dirty="0">
-                          <a:solidFill>
-                            <a:srgbClr val="0E1B2C"/>
-                          </a:solidFill>
-                          <a:latin typeface="Arial"/>
-                          <a:cs typeface="Arial"/>
-                        </a:rPr>
-                        <a:t>Only what the model needs, fees included</a:t>
-                      </a:r>
-                    </a:p>
-                  </a:txBody>
-                  <a:tcPr marL="73152" marR="73152" marT="27432" marB="27432" anchor="ctr">
-                    <a:solidFill>
-                      <a:srgbClr val="EEF4F9"/>
-                    </a:solidFill>
-                  </a:tcPr>
-                </a:tc>
-                <a:extLst>
-                  <a:ext uri="{0D108BD9-81ED-4DB2-BD59-A6C34878D82A}">
-                    <a16:rowId xmlns:a16="http://schemas.microsoft.com/office/drawing/2014/main" val="10002"/>
-                  </a:ext>
-                </a:extLst>
-              </a:tr>
-              <a:tr h="420624">
-                <a:tc>
-                  <a:txBody>
-                    <a:bodyPr/>
-                    <a:lstStyle/>
-                    <a:p>
-                      <a:pPr algn="l"/>
-                      <a:r>
-                        <a:rPr lang="en-US" sz="1100" b="1" i="0" dirty="0">
-                          <a:solidFill>
-                            <a:srgbClr val="0E1B2C"/>
-                          </a:solidFill>
-                          <a:latin typeface="Arial"/>
-                          <a:cs typeface="Arial"/>
-                        </a:rPr>
-                        <a:t>Identity</a:t>
-                      </a:r>
-                    </a:p>
-                  </a:txBody>
-                  <a:tcPr marL="73152" marR="73152" marT="27432" marB="27432" anchor="ctr">
-                    <a:solidFill>
-                      <a:srgbClr val="FFFFFF"/>
-                    </a:solidFill>
-                  </a:tcPr>
-                </a:tc>
-                <a:tc>
-                  <a:txBody>
-                    <a:bodyPr/>
-                    <a:lstStyle/>
-                    <a:p>
-                      <a:pPr algn="l"/>
-                      <a:r>
-                        <a:rPr lang="en-US" sz="1100" b="0" i="0" dirty="0">
-                          <a:solidFill>
-                            <a:srgbClr val="0E1B2C"/>
-                          </a:solidFill>
-                          <a:latin typeface="Arial"/>
-                          <a:cs typeface="Arial"/>
-                        </a:rPr>
-                        <a:t>One shared API key</a:t>
-                      </a:r>
-                    </a:p>
-                  </a:txBody>
-                  <a:tcPr marL="73152" marR="73152" marT="27432" marB="27432" anchor="ctr">
-                    <a:solidFill>
-                      <a:srgbClr val="FFFFFF"/>
-                    </a:solidFill>
-                  </a:tcPr>
-                </a:tc>
-                <a:tc>
-                  <a:txBody>
-                    <a:bodyPr/>
-                    <a:lstStyle/>
-                    <a:p>
-                      <a:pPr algn="l"/>
-                      <a:r>
-                        <a:rPr lang="en-US" sz="1100" b="0" i="0" dirty="0">
-                          <a:solidFill>
-                            <a:srgbClr val="0E1B2C"/>
-                          </a:solidFill>
-                          <a:latin typeface="Arial"/>
-                          <a:cs typeface="Arial"/>
-                        </a:rPr>
-                        <a:t>The person or agent in the token</a:t>
-                      </a:r>
-                    </a:p>
-                  </a:txBody>
-                  <a:tcPr marL="73152" marR="73152" marT="27432" marB="27432" anchor="ctr">
-                    <a:solidFill>
-                      <a:srgbClr val="FFFFFF"/>
-                    </a:solidFill>
-                  </a:tcPr>
-                </a:tc>
-                <a:extLst>
-                  <a:ext uri="{0D108BD9-81ED-4DB2-BD59-A6C34878D82A}">
-                    <a16:rowId xmlns:a16="http://schemas.microsoft.com/office/drawing/2014/main" val="10003"/>
-                  </a:ext>
-                </a:extLst>
-              </a:tr>
-              <a:tr h="420624">
-                <a:tc>
-                  <a:txBody>
-                    <a:bodyPr/>
-                    <a:lstStyle/>
-                    <a:p>
-                      <a:pPr algn="l"/>
-                      <a:r>
-                        <a:rPr lang="en-US" sz="1100" b="1" i="0" dirty="0">
-                          <a:solidFill>
-                            <a:srgbClr val="0E1B2C"/>
-                          </a:solidFill>
-                          <a:latin typeface="Arial"/>
-                          <a:cs typeface="Arial"/>
-                        </a:rPr>
-                        <a:t>Rules</a:t>
-                      </a:r>
-                    </a:p>
-                  </a:txBody>
-                  <a:tcPr marL="73152" marR="73152" marT="27432" marB="27432" anchor="ctr">
-                    <a:solidFill>
-                      <a:srgbClr val="EEF4F9"/>
-                    </a:solidFill>
-                  </a:tcPr>
-                </a:tc>
-                <a:tc>
-                  <a:txBody>
-                    <a:bodyPr/>
-                    <a:lstStyle/>
-                    <a:p>
-                      <a:pPr algn="l"/>
-                      <a:r>
-                        <a:rPr lang="en-US" sz="1100" b="0" i="0" dirty="0">
-                          <a:solidFill>
-                            <a:srgbClr val="0E1B2C"/>
-                          </a:solidFill>
-                          <a:latin typeface="Arial"/>
-                          <a:cs typeface="Arial"/>
-                        </a:rPr>
-                        <a:t>In the prompt</a:t>
-                      </a:r>
-                    </a:p>
-                  </a:txBody>
-                  <a:tcPr marL="73152" marR="73152" marT="27432" marB="27432" anchor="ctr">
-                    <a:solidFill>
-                      <a:srgbClr val="EEF4F9"/>
-                    </a:solidFill>
-                  </a:tcPr>
-                </a:tc>
-                <a:tc>
-                  <a:txBody>
-                    <a:bodyPr/>
-                    <a:lstStyle/>
-                    <a:p>
-                      <a:pPr algn="l"/>
-                      <a:r>
-                        <a:rPr lang="en-US" sz="1100" b="0" i="0" dirty="0">
-                          <a:solidFill>
-                            <a:srgbClr val="0E1B2C"/>
-                          </a:solidFill>
-                          <a:latin typeface="Arial"/>
-                          <a:cs typeface="Arial"/>
-                        </a:rPr>
-                        <a:t>In code: holds against prompt injection</a:t>
-                      </a:r>
-                    </a:p>
-                  </a:txBody>
-                  <a:tcPr marL="73152" marR="73152" marT="27432" marB="27432" anchor="ctr">
-                    <a:solidFill>
-                      <a:srgbClr val="EEF4F9"/>
-                    </a:solidFill>
-                  </a:tcPr>
-                </a:tc>
-                <a:extLst>
-                  <a:ext uri="{0D108BD9-81ED-4DB2-BD59-A6C34878D82A}">
-                    <a16:rowId xmlns:a16="http://schemas.microsoft.com/office/drawing/2014/main" val="10004"/>
-                  </a:ext>
-                </a:extLst>
-              </a:tr>
-              <a:tr h="420624">
-                <a:tc>
-                  <a:txBody>
-                    <a:bodyPr/>
-                    <a:lstStyle/>
-                    <a:p>
-                      <a:pPr algn="l"/>
-                      <a:r>
-                        <a:rPr lang="en-US" sz="1100" b="1" i="0" dirty="0">
-                          <a:solidFill>
-                            <a:srgbClr val="0E1B2C"/>
-                          </a:solidFill>
-                          <a:latin typeface="Arial"/>
-                          <a:cs typeface="Arial"/>
-                        </a:rPr>
-                        <a:t>Risky actions</a:t>
-                      </a:r>
-                    </a:p>
-                  </a:txBody>
-                  <a:tcPr marL="73152" marR="73152" marT="27432" marB="27432" anchor="ctr">
-                    <a:solidFill>
-                      <a:srgbClr val="FFFFFF"/>
-                    </a:solidFill>
-                  </a:tcPr>
-                </a:tc>
-                <a:tc>
-                  <a:txBody>
-                    <a:bodyPr/>
-                    <a:lstStyle/>
-                    <a:p>
-                      <a:pPr algn="l"/>
-                      <a:r>
-                        <a:rPr lang="en-US" sz="1100" b="0" i="0" dirty="0">
-                          <a:solidFill>
-                            <a:srgbClr val="0E1B2C"/>
-                          </a:solidFill>
-                          <a:latin typeface="Arial"/>
-                          <a:cs typeface="Arial"/>
-                        </a:rPr>
-                        <a:t>Just called</a:t>
-                      </a:r>
-                    </a:p>
-                  </a:txBody>
-                  <a:tcPr marL="73152" marR="73152" marT="27432" marB="27432" anchor="ctr">
-                    <a:solidFill>
-                      <a:srgbClr val="FFFFFF"/>
-                    </a:solidFill>
-                  </a:tcPr>
-                </a:tc>
-                <a:tc>
-                  <a:txBody>
-                    <a:bodyPr/>
-                    <a:lstStyle/>
-                    <a:p>
-                      <a:pPr algn="l"/>
-                      <a:r>
-                        <a:rPr lang="en-US" sz="1100" b="0" i="0" dirty="0">
-                          <a:solidFill>
-                            <a:srgbClr val="0E1B2C"/>
-                          </a:solidFill>
-                          <a:latin typeface="Arial"/>
-                          <a:cs typeface="Arial"/>
-                        </a:rPr>
-                        <a:t>A human confirms first</a:t>
-                      </a:r>
-                    </a:p>
-                  </a:txBody>
-                  <a:tcPr marL="73152" marR="73152" marT="27432" marB="27432" anchor="ctr">
-                    <a:solidFill>
-                      <a:srgbClr val="FFFFFF"/>
-                    </a:solidFill>
-                  </a:tcPr>
-                </a:tc>
-                <a:extLst>
-                  <a:ext uri="{0D108BD9-81ED-4DB2-BD59-A6C34878D82A}">
-                    <a16:rowId xmlns:a16="http://schemas.microsoft.com/office/drawing/2014/main" val="10005"/>
-                  </a:ext>
-                </a:extLst>
-              </a:tr>
-            </a:tbl>
-          </a:graphicData>
-        </a:graphic>
-      </p:graphicFrame>
-      <p:sp>
-        <p:nvSpPr>
-          <p:cNvPr id="12" name="roundRect 12"/>
+              <a:t>Why not let every agent call every API?</a:t>
+            </a:r>
+          </a:p>
+        </p:txBody>
+      </p:sp>
+      <p:sp>
+        <p:nvSpPr>
+          <p:cNvPr id="11" name="roundRect 11"/>
           <p:cNvSpPr/>
           <p:nvPr/>
         </p:nvSpPr>
         <p:spPr>
           <a:xfrm>
-            <a:off x="6126480" y="1325880"/>
-            <a:ext cx="2560320" cy="2523744"/>
+            <a:off x="457200" y="1325880"/>
+            <a:ext cx="4023360" cy="2651760"/>
           </a:xfrm>
           <a:prstGeom prst="roundRect">
             <a:avLst>
-              <a:gd name="adj" fmla="val 8000"/>
+              <a:gd name="adj" fmla="val 6000"/>
+            </a:avLst>
+          </a:prstGeom>
+          <a:solidFill>
+            <a:srgbClr val="EEF4F9"/>
+          </a:solidFill>
+          <a:ln>
+            <a:noFill/>
+          </a:ln>
+        </p:spPr>
+        <p:txBody>
+          <a:bodyPr/>
+          <a:lstStyle/>
+          <a:p>
+            <a:endParaRPr lang="en-US"/>
+          </a:p>
+        </p:txBody>
+      </p:sp>
+      <p:sp>
+        <p:nvSpPr>
+          <p:cNvPr id="12" name="TextBox 12"/>
+          <p:cNvSpPr txBox="1"/>
+          <p:nvPr/>
+        </p:nvSpPr>
+        <p:spPr>
+          <a:xfrm>
+            <a:off x="640080" y="1463040"/>
+            <a:ext cx="3657600" cy="274320"/>
+          </a:xfrm>
+          <a:prstGeom prst="rect">
+            <a:avLst/>
+          </a:prstGeom>
+          <a:noFill/>
+        </p:spPr>
+        <p:txBody>
+          <a:bodyPr wrap="square" lIns="0" rIns="0" tIns="0" bIns="0" anchor="t">
+            <a:normAutofit/>
+          </a:bodyPr>
+          <a:lstStyle/>
+          <a:p>
+            <a:pPr algn="l"/>
+            <a:r>
+              <a:rPr lang="en-US" sz="1400" b="1" i="0" dirty="0">
+                <a:solidFill>
+                  <a:srgbClr val="D9434B"/>
+                </a:solidFill>
+                <a:latin typeface="Arial"/>
+                <a:cs typeface="Arial"/>
+              </a:rPr>
+              <a:t>Without MCP</a:t>
+            </a:r>
+          </a:p>
+        </p:txBody>
+      </p:sp>
+      <p:sp>
+        <p:nvSpPr>
+          <p:cNvPr id="13" name="TextBox 13"/>
+          <p:cNvSpPr txBox="1"/>
+          <p:nvPr/>
+        </p:nvSpPr>
+        <p:spPr>
+          <a:xfrm>
+            <a:off x="640080" y="3611880"/>
+            <a:ext cx="3657600" cy="274320"/>
+          </a:xfrm>
+          <a:prstGeom prst="rect">
+            <a:avLst/>
+          </a:prstGeom>
+          <a:noFill/>
+        </p:spPr>
+        <p:txBody>
+          <a:bodyPr wrap="square" lIns="0" rIns="0" tIns="0" bIns="0" anchor="t">
+            <a:normAutofit/>
+          </a:bodyPr>
+          <a:lstStyle/>
+          <a:p>
+            <a:pPr algn="l"/>
+            <a:r>
+              <a:rPr lang="en-US" sz="1100" b="1" i="0" dirty="0">
+                <a:solidFill>
+                  <a:srgbClr val="051832"/>
+                </a:solidFill>
+                <a:latin typeface="Arial"/>
+                <a:cs typeface="Arial"/>
+              </a:rPr>
+              <a:t xml:space="preserve">3 × 5 = 15 integrations, </a:t>
+            </a:r>
+            <a:r>
+              <a:rPr lang="en-US" sz="1100" b="0" i="0" dirty="0">
+                <a:solidFill>
+                  <a:srgbClr val="56657A"/>
+                </a:solidFill>
+                <a:latin typeface="Arial"/>
+                <a:cs typeface="Arial"/>
+              </a:rPr>
+              <a:t>each with its own auth.</a:t>
+            </a:r>
+          </a:p>
+        </p:txBody>
+      </p:sp>
+      <p:cxnSp>
+        <p:nvCxnSpPr>
+          <p:cNvPr id="14" name="Connector 14"/>
+          <p:cNvCxnSpPr/>
+          <p:nvPr/>
+        </p:nvCxnSpPr>
+        <p:spPr>
+          <a:xfrm flipV="1">
+            <a:off x="1691640" y="1997964"/>
+            <a:ext cx="1554480" cy="27432"/>
+          </a:xfrm>
+          <a:prstGeom prst="line">
+            <a:avLst/>
+          </a:prstGeom>
+          <a:ln w="9525">
+            <a:solidFill>
+              <a:srgbClr val="9AA8B8"/>
+            </a:solidFill>
+          </a:ln>
+        </p:spPr>
+      </p:cxnSp>
+      <p:cxnSp>
+        <p:nvCxnSpPr>
+          <p:cNvPr id="15" name="Connector 15"/>
+          <p:cNvCxnSpPr/>
+          <p:nvPr/>
+        </p:nvCxnSpPr>
+        <p:spPr>
+          <a:xfrm>
+            <a:off x="1691640" y="2025396"/>
+            <a:ext cx="1554480" cy="253746"/>
+          </a:xfrm>
+          <a:prstGeom prst="line">
+            <a:avLst/>
+          </a:prstGeom>
+          <a:ln w="9525">
+            <a:solidFill>
+              <a:srgbClr val="9AA8B8"/>
+            </a:solidFill>
+          </a:ln>
+        </p:spPr>
+      </p:cxnSp>
+      <p:cxnSp>
+        <p:nvCxnSpPr>
+          <p:cNvPr id="16" name="Connector 16"/>
+          <p:cNvCxnSpPr/>
+          <p:nvPr/>
+        </p:nvCxnSpPr>
+        <p:spPr>
+          <a:xfrm>
+            <a:off x="1691640" y="2025396"/>
+            <a:ext cx="1554480" cy="534924"/>
+          </a:xfrm>
+          <a:prstGeom prst="line">
+            <a:avLst/>
+          </a:prstGeom>
+          <a:ln w="9525">
+            <a:solidFill>
+              <a:srgbClr val="9AA8B8"/>
+            </a:solidFill>
+          </a:ln>
+        </p:spPr>
+      </p:cxnSp>
+      <p:cxnSp>
+        <p:nvCxnSpPr>
+          <p:cNvPr id="17" name="Connector 17"/>
+          <p:cNvCxnSpPr/>
+          <p:nvPr/>
+        </p:nvCxnSpPr>
+        <p:spPr>
+          <a:xfrm>
+            <a:off x="1691640" y="2025396"/>
+            <a:ext cx="1554480" cy="816102"/>
+          </a:xfrm>
+          <a:prstGeom prst="line">
+            <a:avLst/>
+          </a:prstGeom>
+          <a:ln w="9525">
+            <a:solidFill>
+              <a:srgbClr val="9AA8B8"/>
+            </a:solidFill>
+          </a:ln>
+        </p:spPr>
+      </p:cxnSp>
+      <p:cxnSp>
+        <p:nvCxnSpPr>
+          <p:cNvPr id="18" name="Connector 18"/>
+          <p:cNvCxnSpPr/>
+          <p:nvPr/>
+        </p:nvCxnSpPr>
+        <p:spPr>
+          <a:xfrm>
+            <a:off x="1691640" y="2025396"/>
+            <a:ext cx="1554480" cy="1097280"/>
+          </a:xfrm>
+          <a:prstGeom prst="line">
+            <a:avLst/>
+          </a:prstGeom>
+          <a:ln w="9525">
+            <a:solidFill>
+              <a:srgbClr val="9AA8B8"/>
+            </a:solidFill>
+          </a:ln>
+        </p:spPr>
+      </p:cxnSp>
+      <p:cxnSp>
+        <p:nvCxnSpPr>
+          <p:cNvPr id="19" name="Connector 19"/>
+          <p:cNvCxnSpPr/>
+          <p:nvPr/>
+        </p:nvCxnSpPr>
+        <p:spPr>
+          <a:xfrm flipV="1">
+            <a:off x="1691640" y="1997964"/>
+            <a:ext cx="1554480" cy="562356"/>
+          </a:xfrm>
+          <a:prstGeom prst="line">
+            <a:avLst/>
+          </a:prstGeom>
+          <a:ln w="9525">
+            <a:solidFill>
+              <a:srgbClr val="9AA8B8"/>
+            </a:solidFill>
+          </a:ln>
+        </p:spPr>
+      </p:cxnSp>
+      <p:cxnSp>
+        <p:nvCxnSpPr>
+          <p:cNvPr id="20" name="Connector 20"/>
+          <p:cNvCxnSpPr/>
+          <p:nvPr/>
+        </p:nvCxnSpPr>
+        <p:spPr>
+          <a:xfrm flipV="1">
+            <a:off x="1691640" y="2279142"/>
+            <a:ext cx="1554480" cy="281178"/>
+          </a:xfrm>
+          <a:prstGeom prst="line">
+            <a:avLst/>
+          </a:prstGeom>
+          <a:ln w="9525">
+            <a:solidFill>
+              <a:srgbClr val="9AA8B8"/>
+            </a:solidFill>
+          </a:ln>
+        </p:spPr>
+      </p:cxnSp>
+      <p:cxnSp>
+        <p:nvCxnSpPr>
+          <p:cNvPr id="21" name="Connector 21"/>
+          <p:cNvCxnSpPr/>
+          <p:nvPr/>
+        </p:nvCxnSpPr>
+        <p:spPr>
+          <a:xfrm>
+            <a:off x="1691640" y="2560320"/>
+            <a:ext cx="1554480" cy="0"/>
+          </a:xfrm>
+          <a:prstGeom prst="line">
+            <a:avLst/>
+          </a:prstGeom>
+          <a:ln w="9525">
+            <a:solidFill>
+              <a:srgbClr val="9AA8B8"/>
+            </a:solidFill>
+          </a:ln>
+        </p:spPr>
+      </p:cxnSp>
+      <p:cxnSp>
+        <p:nvCxnSpPr>
+          <p:cNvPr id="22" name="Connector 22"/>
+          <p:cNvCxnSpPr/>
+          <p:nvPr/>
+        </p:nvCxnSpPr>
+        <p:spPr>
+          <a:xfrm>
+            <a:off x="1691640" y="2560320"/>
+            <a:ext cx="1554480" cy="281178"/>
+          </a:xfrm>
+          <a:prstGeom prst="line">
+            <a:avLst/>
+          </a:prstGeom>
+          <a:ln w="9525">
+            <a:solidFill>
+              <a:srgbClr val="9AA8B8"/>
+            </a:solidFill>
+          </a:ln>
+        </p:spPr>
+      </p:cxnSp>
+      <p:cxnSp>
+        <p:nvCxnSpPr>
+          <p:cNvPr id="23" name="Connector 23"/>
+          <p:cNvCxnSpPr/>
+          <p:nvPr/>
+        </p:nvCxnSpPr>
+        <p:spPr>
+          <a:xfrm>
+            <a:off x="1691640" y="2560320"/>
+            <a:ext cx="1554480" cy="562356"/>
+          </a:xfrm>
+          <a:prstGeom prst="line">
+            <a:avLst/>
+          </a:prstGeom>
+          <a:ln w="9525">
+            <a:solidFill>
+              <a:srgbClr val="9AA8B8"/>
+            </a:solidFill>
+          </a:ln>
+        </p:spPr>
+      </p:cxnSp>
+      <p:cxnSp>
+        <p:nvCxnSpPr>
+          <p:cNvPr id="24" name="Connector 24"/>
+          <p:cNvCxnSpPr/>
+          <p:nvPr/>
+        </p:nvCxnSpPr>
+        <p:spPr>
+          <a:xfrm flipV="1">
+            <a:off x="1691640" y="1997964"/>
+            <a:ext cx="1554480" cy="1097280"/>
+          </a:xfrm>
+          <a:prstGeom prst="line">
+            <a:avLst/>
+          </a:prstGeom>
+          <a:ln w="15875">
+            <a:solidFill>
+              <a:srgbClr val="D9434B"/>
+            </a:solidFill>
+            <a:prstDash val="dash"/>
+          </a:ln>
+        </p:spPr>
+      </p:cxnSp>
+      <p:cxnSp>
+        <p:nvCxnSpPr>
+          <p:cNvPr id="25" name="Connector 25"/>
+          <p:cNvCxnSpPr/>
+          <p:nvPr/>
+        </p:nvCxnSpPr>
+        <p:spPr>
+          <a:xfrm flipV="1">
+            <a:off x="1691640" y="2279142"/>
+            <a:ext cx="1554480" cy="816102"/>
+          </a:xfrm>
+          <a:prstGeom prst="line">
+            <a:avLst/>
+          </a:prstGeom>
+          <a:ln w="15875">
+            <a:solidFill>
+              <a:srgbClr val="D9434B"/>
+            </a:solidFill>
+            <a:prstDash val="dash"/>
+          </a:ln>
+        </p:spPr>
+      </p:cxnSp>
+      <p:cxnSp>
+        <p:nvCxnSpPr>
+          <p:cNvPr id="26" name="Connector 26"/>
+          <p:cNvCxnSpPr/>
+          <p:nvPr/>
+        </p:nvCxnSpPr>
+        <p:spPr>
+          <a:xfrm flipV="1">
+            <a:off x="1691640" y="2560320"/>
+            <a:ext cx="1554480" cy="534924"/>
+          </a:xfrm>
+          <a:prstGeom prst="line">
+            <a:avLst/>
+          </a:prstGeom>
+          <a:ln w="15875">
+            <a:solidFill>
+              <a:srgbClr val="D9434B"/>
+            </a:solidFill>
+            <a:prstDash val="dash"/>
+          </a:ln>
+        </p:spPr>
+      </p:cxnSp>
+      <p:cxnSp>
+        <p:nvCxnSpPr>
+          <p:cNvPr id="27" name="Connector 27"/>
+          <p:cNvCxnSpPr/>
+          <p:nvPr/>
+        </p:nvCxnSpPr>
+        <p:spPr>
+          <a:xfrm flipV="1">
+            <a:off x="1691640" y="2841498"/>
+            <a:ext cx="1554480" cy="253746"/>
+          </a:xfrm>
+          <a:prstGeom prst="line">
+            <a:avLst/>
+          </a:prstGeom>
+          <a:ln w="15875">
+            <a:solidFill>
+              <a:srgbClr val="D9434B"/>
+            </a:solidFill>
+            <a:prstDash val="dash"/>
+          </a:ln>
+        </p:spPr>
+      </p:cxnSp>
+      <p:cxnSp>
+        <p:nvCxnSpPr>
+          <p:cNvPr id="28" name="Connector 28"/>
+          <p:cNvCxnSpPr/>
+          <p:nvPr/>
+        </p:nvCxnSpPr>
+        <p:spPr>
+          <a:xfrm>
+            <a:off x="1691640" y="3095244"/>
+            <a:ext cx="1554480" cy="27432"/>
+          </a:xfrm>
+          <a:prstGeom prst="line">
+            <a:avLst/>
+          </a:prstGeom>
+          <a:ln w="15875">
+            <a:solidFill>
+              <a:srgbClr val="D9434B"/>
+            </a:solidFill>
+            <a:prstDash val="dash"/>
+          </a:ln>
+        </p:spPr>
+      </p:cxnSp>
+      <p:sp>
+        <p:nvSpPr>
+          <p:cNvPr id="29" name="roundRect 29"/>
+          <p:cNvSpPr/>
+          <p:nvPr/>
+        </p:nvSpPr>
+        <p:spPr>
+          <a:xfrm>
+            <a:off x="594360" y="1874520"/>
+            <a:ext cx="1097280" cy="301752"/>
+          </a:xfrm>
+          <a:prstGeom prst="roundRect">
+            <a:avLst>
+              <a:gd name="adj" fmla="val 20000"/>
+            </a:avLst>
+          </a:prstGeom>
+          <a:solidFill>
+            <a:srgbClr val="FFFFFF"/>
+          </a:solidFill>
+          <a:ln>
+            <a:noFill/>
+          </a:ln>
+        </p:spPr>
+        <p:txBody>
+          <a:bodyPr rtlCol="0" anchor="ctr" lIns="0" rIns="0" tIns="0" bIns="0"/>
+          <a:lstStyle/>
+          <a:p>
+            <a:pPr algn="ctr"/>
+            <a:r>
+              <a:rPr lang="en-US" sz="1000" b="1" i="0" dirty="0">
+                <a:solidFill>
+                  <a:srgbClr val="051832"/>
+                </a:solidFill>
+                <a:latin typeface="Arial"/>
+                <a:cs typeface="Arial"/>
+              </a:rPr>
+              <a:t>Copilot agent</a:t>
+            </a:r>
+          </a:p>
+        </p:txBody>
+      </p:sp>
+      <p:sp>
+        <p:nvSpPr>
+          <p:cNvPr id="30" name="roundRect 30"/>
+          <p:cNvSpPr/>
+          <p:nvPr/>
+        </p:nvSpPr>
+        <p:spPr>
+          <a:xfrm>
+            <a:off x="594360" y="2409444"/>
+            <a:ext cx="1097280" cy="301752"/>
+          </a:xfrm>
+          <a:prstGeom prst="roundRect">
+            <a:avLst>
+              <a:gd name="adj" fmla="val 20000"/>
+            </a:avLst>
+          </a:prstGeom>
+          <a:solidFill>
+            <a:srgbClr val="FFFFFF"/>
+          </a:solidFill>
+          <a:ln>
+            <a:noFill/>
+          </a:ln>
+        </p:spPr>
+        <p:txBody>
+          <a:bodyPr rtlCol="0" anchor="ctr" lIns="0" rIns="0" tIns="0" bIns="0"/>
+          <a:lstStyle/>
+          <a:p>
+            <a:pPr algn="ctr"/>
+            <a:r>
+              <a:rPr lang="en-US" sz="1000" b="1" i="0" dirty="0">
+                <a:solidFill>
+                  <a:srgbClr val="051832"/>
+                </a:solidFill>
+                <a:latin typeface="Arial"/>
+                <a:cs typeface="Arial"/>
+              </a:rPr>
+              <a:t>Claude agent</a:t>
+            </a:r>
+          </a:p>
+        </p:txBody>
+      </p:sp>
+      <p:sp>
+        <p:nvSpPr>
+          <p:cNvPr id="31" name="roundRect 31"/>
+          <p:cNvSpPr/>
+          <p:nvPr/>
+        </p:nvSpPr>
+        <p:spPr>
+          <a:xfrm>
+            <a:off x="594360" y="2944368"/>
+            <a:ext cx="1097280" cy="301752"/>
+          </a:xfrm>
+          <a:prstGeom prst="roundRect">
+            <a:avLst>
+              <a:gd name="adj" fmla="val 20000"/>
+            </a:avLst>
+          </a:prstGeom>
+          <a:solidFill>
+            <a:srgbClr val="FFFFFF"/>
+          </a:solidFill>
+          <a:ln w="12700">
+            <a:solidFill>
+              <a:srgbClr val="D9434B"/>
+            </a:solidFill>
+            <a:prstDash val="dash"/>
+          </a:ln>
+        </p:spPr>
+        <p:txBody>
+          <a:bodyPr rtlCol="0" anchor="ctr" lIns="0" rIns="0" tIns="0" bIns="0"/>
+          <a:lstStyle/>
+          <a:p>
+            <a:pPr algn="ctr"/>
+            <a:r>
+              <a:rPr lang="en-US" sz="1000" b="1" i="0" dirty="0">
+                <a:solidFill>
+                  <a:srgbClr val="D9434B"/>
+                </a:solidFill>
+                <a:latin typeface="Arial"/>
+                <a:cs typeface="Arial"/>
+              </a:rPr>
+              <a:t>New agent</a:t>
+            </a:r>
+          </a:p>
+        </p:txBody>
+      </p:sp>
+      <p:sp>
+        <p:nvSpPr>
+          <p:cNvPr id="32" name="roundRect 32"/>
+          <p:cNvSpPr/>
+          <p:nvPr/>
+        </p:nvSpPr>
+        <p:spPr>
+          <a:xfrm>
+            <a:off x="3246120" y="1874520"/>
+            <a:ext cx="1097280" cy="246888"/>
+          </a:xfrm>
+          <a:prstGeom prst="roundRect">
+            <a:avLst>
+              <a:gd name="adj" fmla="val 20000"/>
+            </a:avLst>
+          </a:prstGeom>
+          <a:solidFill>
+            <a:srgbClr val="FFFFFF"/>
+          </a:solidFill>
+          <a:ln>
+            <a:noFill/>
+          </a:ln>
+        </p:spPr>
+        <p:txBody>
+          <a:bodyPr rtlCol="0" anchor="ctr" lIns="0" rIns="0" tIns="0" bIns="0"/>
+          <a:lstStyle/>
+          <a:p>
+            <a:pPr algn="ctr"/>
+            <a:r>
+              <a:rPr lang="en-US" sz="1000" b="1" i="0" dirty="0">
+                <a:solidFill>
+                  <a:srgbClr val="051832"/>
+                </a:solidFill>
+                <a:latin typeface="Arial"/>
+                <a:cs typeface="Arial"/>
+              </a:rPr>
+              <a:t>GitHub</a:t>
+            </a:r>
+          </a:p>
+        </p:txBody>
+      </p:sp>
+      <p:sp>
+        <p:nvSpPr>
+          <p:cNvPr id="33" name="roundRect 33"/>
+          <p:cNvSpPr/>
+          <p:nvPr/>
+        </p:nvSpPr>
+        <p:spPr>
+          <a:xfrm>
+            <a:off x="3246120" y="2155698"/>
+            <a:ext cx="1097280" cy="246888"/>
+          </a:xfrm>
+          <a:prstGeom prst="roundRect">
+            <a:avLst>
+              <a:gd name="adj" fmla="val 20000"/>
+            </a:avLst>
+          </a:prstGeom>
+          <a:solidFill>
+            <a:srgbClr val="FFFFFF"/>
+          </a:solidFill>
+          <a:ln>
+            <a:noFill/>
+          </a:ln>
+        </p:spPr>
+        <p:txBody>
+          <a:bodyPr rtlCol="0" anchor="ctr" lIns="0" rIns="0" tIns="0" bIns="0"/>
+          <a:lstStyle/>
+          <a:p>
+            <a:pPr algn="ctr"/>
+            <a:r>
+              <a:rPr lang="en-US" sz="1000" b="1" i="0" dirty="0">
+                <a:solidFill>
+                  <a:srgbClr val="051832"/>
+                </a:solidFill>
+                <a:latin typeface="Arial"/>
+                <a:cs typeface="Arial"/>
+              </a:rPr>
+              <a:t>Jira</a:t>
+            </a:r>
+          </a:p>
+        </p:txBody>
+      </p:sp>
+      <p:sp>
+        <p:nvSpPr>
+          <p:cNvPr id="34" name="roundRect 34"/>
+          <p:cNvSpPr/>
+          <p:nvPr/>
+        </p:nvSpPr>
+        <p:spPr>
+          <a:xfrm>
+            <a:off x="3246120" y="2436876"/>
+            <a:ext cx="1097280" cy="246888"/>
+          </a:xfrm>
+          <a:prstGeom prst="roundRect">
+            <a:avLst>
+              <a:gd name="adj" fmla="val 20000"/>
+            </a:avLst>
+          </a:prstGeom>
+          <a:solidFill>
+            <a:srgbClr val="FFFFFF"/>
+          </a:solidFill>
+          <a:ln>
+            <a:noFill/>
+          </a:ln>
+        </p:spPr>
+        <p:txBody>
+          <a:bodyPr rtlCol="0" anchor="ctr" lIns="0" rIns="0" tIns="0" bIns="0"/>
+          <a:lstStyle/>
+          <a:p>
+            <a:pPr algn="ctr"/>
+            <a:r>
+              <a:rPr lang="en-US" sz="1000" b="1" i="0" dirty="0">
+                <a:solidFill>
+                  <a:srgbClr val="051832"/>
+                </a:solidFill>
+                <a:latin typeface="Arial"/>
+                <a:cs typeface="Arial"/>
+              </a:rPr>
+              <a:t>Confluence</a:t>
+            </a:r>
+          </a:p>
+        </p:txBody>
+      </p:sp>
+      <p:sp>
+        <p:nvSpPr>
+          <p:cNvPr id="35" name="roundRect 35"/>
+          <p:cNvSpPr/>
+          <p:nvPr/>
+        </p:nvSpPr>
+        <p:spPr>
+          <a:xfrm>
+            <a:off x="3246120" y="2718054"/>
+            <a:ext cx="1097280" cy="246888"/>
+          </a:xfrm>
+          <a:prstGeom prst="roundRect">
+            <a:avLst>
+              <a:gd name="adj" fmla="val 20000"/>
+            </a:avLst>
+          </a:prstGeom>
+          <a:solidFill>
+            <a:srgbClr val="FFFFFF"/>
+          </a:solidFill>
+          <a:ln>
+            <a:noFill/>
+          </a:ln>
+        </p:spPr>
+        <p:txBody>
+          <a:bodyPr rtlCol="0" anchor="ctr" lIns="0" rIns="0" tIns="0" bIns="0"/>
+          <a:lstStyle/>
+          <a:p>
+            <a:pPr algn="ctr"/>
+            <a:r>
+              <a:rPr lang="en-US" sz="1000" b="1" i="0" dirty="0">
+                <a:solidFill>
+                  <a:srgbClr val="051832"/>
+                </a:solidFill>
+                <a:latin typeface="Arial"/>
+                <a:cs typeface="Arial"/>
+              </a:rPr>
+              <a:t>ServiceNow</a:t>
+            </a:r>
+          </a:p>
+        </p:txBody>
+      </p:sp>
+      <p:sp>
+        <p:nvSpPr>
+          <p:cNvPr id="36" name="roundRect 36"/>
+          <p:cNvSpPr/>
+          <p:nvPr/>
+        </p:nvSpPr>
+        <p:spPr>
+          <a:xfrm>
+            <a:off x="3246120" y="2999232"/>
+            <a:ext cx="1097280" cy="246888"/>
+          </a:xfrm>
+          <a:prstGeom prst="roundRect">
+            <a:avLst>
+              <a:gd name="adj" fmla="val 20000"/>
+            </a:avLst>
+          </a:prstGeom>
+          <a:solidFill>
+            <a:srgbClr val="FFFFFF"/>
+          </a:solidFill>
+          <a:ln>
+            <a:noFill/>
+          </a:ln>
+        </p:spPr>
+        <p:txBody>
+          <a:bodyPr rtlCol="0" anchor="ctr" lIns="0" rIns="0" tIns="0" bIns="0"/>
+          <a:lstStyle/>
+          <a:p>
+            <a:pPr algn="ctr"/>
+            <a:r>
+              <a:rPr lang="en-US" sz="1000" b="1" i="0" dirty="0">
+                <a:solidFill>
+                  <a:srgbClr val="051832"/>
+                </a:solidFill>
+                <a:latin typeface="Arial"/>
+                <a:cs typeface="Arial"/>
+              </a:rPr>
+              <a:t>Slack</a:t>
+            </a:r>
+          </a:p>
+        </p:txBody>
+      </p:sp>
+      <p:sp>
+        <p:nvSpPr>
+          <p:cNvPr id="37" name="TextBox 37"/>
+          <p:cNvSpPr txBox="1"/>
+          <p:nvPr/>
+        </p:nvSpPr>
+        <p:spPr>
+          <a:xfrm>
+            <a:off x="594360" y="3291840"/>
+            <a:ext cx="1280160" cy="182880"/>
+          </a:xfrm>
+          <a:prstGeom prst="rect">
+            <a:avLst/>
+          </a:prstGeom>
+          <a:noFill/>
+        </p:spPr>
+        <p:txBody>
+          <a:bodyPr wrap="square" lIns="0" rIns="0" tIns="0" bIns="0" anchor="t">
+            <a:normAutofit/>
+          </a:bodyPr>
+          <a:lstStyle/>
+          <a:p>
+            <a:pPr algn="l"/>
+            <a:r>
+              <a:rPr lang="en-US" sz="900" b="1" i="0" dirty="0">
+                <a:solidFill>
+                  <a:srgbClr val="D9434B"/>
+                </a:solidFill>
+                <a:latin typeface="Arial"/>
+                <a:cs typeface="Arial"/>
+              </a:rPr>
+              <a:t>+5 more to build</a:t>
+            </a:r>
+          </a:p>
+        </p:txBody>
+      </p:sp>
+      <p:sp>
+        <p:nvSpPr>
+          <p:cNvPr id="38" name="roundRect 38"/>
+          <p:cNvSpPr/>
+          <p:nvPr/>
+        </p:nvSpPr>
+        <p:spPr>
+          <a:xfrm>
+            <a:off x="4663440" y="1325880"/>
+            <a:ext cx="4023360" cy="2651760"/>
+          </a:xfrm>
+          <a:prstGeom prst="roundRect">
+            <a:avLst>
+              <a:gd name="adj" fmla="val 6000"/>
+            </a:avLst>
+          </a:prstGeom>
+          <a:solidFill>
+            <a:srgbClr val="EEF4F9"/>
+          </a:solidFill>
+          <a:ln>
+            <a:noFill/>
+          </a:ln>
+        </p:spPr>
+        <p:txBody>
+          <a:bodyPr/>
+          <a:lstStyle/>
+          <a:p>
+            <a:endParaRPr lang="en-US"/>
+          </a:p>
+        </p:txBody>
+      </p:sp>
+      <p:sp>
+        <p:nvSpPr>
+          <p:cNvPr id="39" name="TextBox 39"/>
+          <p:cNvSpPr txBox="1"/>
+          <p:nvPr/>
+        </p:nvSpPr>
+        <p:spPr>
+          <a:xfrm>
+            <a:off x="4846320" y="1463040"/>
+            <a:ext cx="3657600" cy="274320"/>
+          </a:xfrm>
+          <a:prstGeom prst="rect">
+            <a:avLst/>
+          </a:prstGeom>
+          <a:noFill/>
+        </p:spPr>
+        <p:txBody>
+          <a:bodyPr wrap="square" lIns="0" rIns="0" tIns="0" bIns="0" anchor="t">
+            <a:normAutofit/>
+          </a:bodyPr>
+          <a:lstStyle/>
+          <a:p>
+            <a:pPr algn="l"/>
+            <a:r>
+              <a:rPr lang="en-US" sz="1400" b="1" i="0" dirty="0">
+                <a:solidFill>
+                  <a:srgbClr val="1E8E52"/>
+                </a:solidFill>
+                <a:latin typeface="Arial"/>
+                <a:cs typeface="Arial"/>
+              </a:rPr>
+              <a:t>With MCP</a:t>
+            </a:r>
+          </a:p>
+        </p:txBody>
+      </p:sp>
+      <p:sp>
+        <p:nvSpPr>
+          <p:cNvPr id="40" name="TextBox 40"/>
+          <p:cNvSpPr txBox="1"/>
+          <p:nvPr/>
+        </p:nvSpPr>
+        <p:spPr>
+          <a:xfrm>
+            <a:off x="4846320" y="3611880"/>
+            <a:ext cx="3657600" cy="274320"/>
+          </a:xfrm>
+          <a:prstGeom prst="rect">
+            <a:avLst/>
+          </a:prstGeom>
+          <a:noFill/>
+        </p:spPr>
+        <p:txBody>
+          <a:bodyPr wrap="square" lIns="0" rIns="0" tIns="0" bIns="0" anchor="t">
+            <a:normAutofit/>
+          </a:bodyPr>
+          <a:lstStyle/>
+          <a:p>
+            <a:pPr algn="l"/>
+            <a:r>
+              <a:rPr lang="en-US" sz="1100" b="1" i="0" dirty="0">
+                <a:solidFill>
+                  <a:srgbClr val="051832"/>
+                </a:solidFill>
+                <a:latin typeface="Arial"/>
+                <a:cs typeface="Arial"/>
+              </a:rPr>
+              <a:t xml:space="preserve">3 + 5 = 8 links. </a:t>
+            </a:r>
+            <a:r>
+              <a:rPr lang="en-US" sz="1100" b="0" i="0" dirty="0">
+                <a:solidFill>
+                  <a:srgbClr val="56657A"/>
+                </a:solidFill>
+                <a:latin typeface="Arial"/>
+                <a:cs typeface="Arial"/>
+              </a:rPr>
+              <a:t>One place for auth, policy, audit.</a:t>
+            </a:r>
+          </a:p>
+        </p:txBody>
+      </p:sp>
+      <p:cxnSp>
+        <p:nvCxnSpPr>
+          <p:cNvPr id="41" name="Connector 41"/>
+          <p:cNvCxnSpPr/>
+          <p:nvPr/>
+        </p:nvCxnSpPr>
+        <p:spPr>
+          <a:xfrm>
+            <a:off x="5897880" y="2025396"/>
+            <a:ext cx="297180" cy="306324"/>
+          </a:xfrm>
+          <a:prstGeom prst="line">
+            <a:avLst/>
+          </a:prstGeom>
+          <a:ln w="12700">
+            <a:solidFill>
+              <a:srgbClr val="01B1EA"/>
+            </a:solidFill>
+          </a:ln>
+        </p:spPr>
+      </p:cxnSp>
+      <p:cxnSp>
+        <p:nvCxnSpPr>
+          <p:cNvPr id="42" name="Connector 42"/>
+          <p:cNvCxnSpPr/>
+          <p:nvPr/>
+        </p:nvCxnSpPr>
+        <p:spPr>
+          <a:xfrm>
+            <a:off x="5897880" y="2560320"/>
+            <a:ext cx="297180" cy="0"/>
+          </a:xfrm>
+          <a:prstGeom prst="line">
+            <a:avLst/>
+          </a:prstGeom>
+          <a:ln w="12700">
+            <a:solidFill>
+              <a:srgbClr val="01B1EA"/>
+            </a:solidFill>
+          </a:ln>
+        </p:spPr>
+      </p:cxnSp>
+      <p:cxnSp>
+        <p:nvCxnSpPr>
+          <p:cNvPr id="43" name="Connector 43"/>
+          <p:cNvCxnSpPr/>
+          <p:nvPr/>
+        </p:nvCxnSpPr>
+        <p:spPr>
+          <a:xfrm flipV="1">
+            <a:off x="5897880" y="2788920"/>
+            <a:ext cx="297180" cy="306324"/>
+          </a:xfrm>
+          <a:prstGeom prst="line">
+            <a:avLst/>
+          </a:prstGeom>
+          <a:ln w="15875">
+            <a:solidFill>
+              <a:srgbClr val="1E8E52"/>
+            </a:solidFill>
+            <a:prstDash val="dash"/>
+          </a:ln>
+        </p:spPr>
+      </p:cxnSp>
+      <p:cxnSp>
+        <p:nvCxnSpPr>
+          <p:cNvPr id="44" name="Connector 44"/>
+          <p:cNvCxnSpPr/>
+          <p:nvPr/>
+        </p:nvCxnSpPr>
+        <p:spPr>
+          <a:xfrm flipV="1">
+            <a:off x="7155180" y="1997964"/>
+            <a:ext cx="297180" cy="421767"/>
+          </a:xfrm>
+          <a:prstGeom prst="line">
+            <a:avLst/>
+          </a:prstGeom>
+          <a:ln w="12700">
+            <a:solidFill>
+              <a:srgbClr val="01B1EA"/>
+            </a:solidFill>
+          </a:ln>
+        </p:spPr>
+      </p:cxnSp>
+      <p:cxnSp>
+        <p:nvCxnSpPr>
+          <p:cNvPr id="45" name="Connector 45"/>
+          <p:cNvCxnSpPr/>
+          <p:nvPr/>
+        </p:nvCxnSpPr>
+        <p:spPr>
+          <a:xfrm flipV="1">
+            <a:off x="7155180" y="2279142"/>
+            <a:ext cx="297180" cy="210883"/>
+          </a:xfrm>
+          <a:prstGeom prst="line">
+            <a:avLst/>
+          </a:prstGeom>
+          <a:ln w="12700">
+            <a:solidFill>
+              <a:srgbClr val="01B1EA"/>
+            </a:solidFill>
+          </a:ln>
+        </p:spPr>
+      </p:cxnSp>
+      <p:cxnSp>
+        <p:nvCxnSpPr>
+          <p:cNvPr id="46" name="Connector 46"/>
+          <p:cNvCxnSpPr/>
+          <p:nvPr/>
+        </p:nvCxnSpPr>
+        <p:spPr>
+          <a:xfrm>
+            <a:off x="7155180" y="2560320"/>
+            <a:ext cx="297180" cy="0"/>
+          </a:xfrm>
+          <a:prstGeom prst="line">
+            <a:avLst/>
+          </a:prstGeom>
+          <a:ln w="12700">
+            <a:solidFill>
+              <a:srgbClr val="01B1EA"/>
+            </a:solidFill>
+          </a:ln>
+        </p:spPr>
+      </p:cxnSp>
+      <p:cxnSp>
+        <p:nvCxnSpPr>
+          <p:cNvPr id="47" name="Connector 47"/>
+          <p:cNvCxnSpPr/>
+          <p:nvPr/>
+        </p:nvCxnSpPr>
+        <p:spPr>
+          <a:xfrm>
+            <a:off x="7155180" y="2630614"/>
+            <a:ext cx="297180" cy="210884"/>
+          </a:xfrm>
+          <a:prstGeom prst="line">
+            <a:avLst/>
+          </a:prstGeom>
+          <a:ln w="12700">
+            <a:solidFill>
+              <a:srgbClr val="01B1EA"/>
+            </a:solidFill>
+          </a:ln>
+        </p:spPr>
+      </p:cxnSp>
+      <p:cxnSp>
+        <p:nvCxnSpPr>
+          <p:cNvPr id="48" name="Connector 48"/>
+          <p:cNvCxnSpPr/>
+          <p:nvPr/>
+        </p:nvCxnSpPr>
+        <p:spPr>
+          <a:xfrm>
+            <a:off x="7155180" y="2700909"/>
+            <a:ext cx="297180" cy="421767"/>
+          </a:xfrm>
+          <a:prstGeom prst="line">
+            <a:avLst/>
+          </a:prstGeom>
+          <a:ln w="12700">
+            <a:solidFill>
+              <a:srgbClr val="01B1EA"/>
+            </a:solidFill>
+          </a:ln>
+        </p:spPr>
+      </p:cxnSp>
+      <p:sp>
+        <p:nvSpPr>
+          <p:cNvPr id="49" name="roundRect 49"/>
+          <p:cNvSpPr/>
+          <p:nvPr/>
+        </p:nvSpPr>
+        <p:spPr>
+          <a:xfrm>
+            <a:off x="4800600" y="1874520"/>
+            <a:ext cx="1097280" cy="301752"/>
+          </a:xfrm>
+          <a:prstGeom prst="roundRect">
+            <a:avLst>
+              <a:gd name="adj" fmla="val 20000"/>
+            </a:avLst>
+          </a:prstGeom>
+          <a:solidFill>
+            <a:srgbClr val="FFFFFF"/>
+          </a:solidFill>
+          <a:ln>
+            <a:noFill/>
+          </a:ln>
+        </p:spPr>
+        <p:txBody>
+          <a:bodyPr rtlCol="0" anchor="ctr" lIns="0" rIns="0" tIns="0" bIns="0"/>
+          <a:lstStyle/>
+          <a:p>
+            <a:pPr algn="ctr"/>
+            <a:r>
+              <a:rPr lang="en-US" sz="1000" b="1" i="0" dirty="0">
+                <a:solidFill>
+                  <a:srgbClr val="051832"/>
+                </a:solidFill>
+                <a:latin typeface="Arial"/>
+                <a:cs typeface="Arial"/>
+              </a:rPr>
+              <a:t>Copilot agent</a:t>
+            </a:r>
+          </a:p>
+        </p:txBody>
+      </p:sp>
+      <p:sp>
+        <p:nvSpPr>
+          <p:cNvPr id="50" name="roundRect 50"/>
+          <p:cNvSpPr/>
+          <p:nvPr/>
+        </p:nvSpPr>
+        <p:spPr>
+          <a:xfrm>
+            <a:off x="4800600" y="2409444"/>
+            <a:ext cx="1097280" cy="301752"/>
+          </a:xfrm>
+          <a:prstGeom prst="roundRect">
+            <a:avLst>
+              <a:gd name="adj" fmla="val 20000"/>
+            </a:avLst>
+          </a:prstGeom>
+          <a:solidFill>
+            <a:srgbClr val="FFFFFF"/>
+          </a:solidFill>
+          <a:ln>
+            <a:noFill/>
+          </a:ln>
+        </p:spPr>
+        <p:txBody>
+          <a:bodyPr rtlCol="0" anchor="ctr" lIns="0" rIns="0" tIns="0" bIns="0"/>
+          <a:lstStyle/>
+          <a:p>
+            <a:pPr algn="ctr"/>
+            <a:r>
+              <a:rPr lang="en-US" sz="1000" b="1" i="0" dirty="0">
+                <a:solidFill>
+                  <a:srgbClr val="051832"/>
+                </a:solidFill>
+                <a:latin typeface="Arial"/>
+                <a:cs typeface="Arial"/>
+              </a:rPr>
+              <a:t>Claude agent</a:t>
+            </a:r>
+          </a:p>
+        </p:txBody>
+      </p:sp>
+      <p:sp>
+        <p:nvSpPr>
+          <p:cNvPr id="51" name="roundRect 51"/>
+          <p:cNvSpPr/>
+          <p:nvPr/>
+        </p:nvSpPr>
+        <p:spPr>
+          <a:xfrm>
+            <a:off x="4800600" y="2944368"/>
+            <a:ext cx="1097280" cy="301752"/>
+          </a:xfrm>
+          <a:prstGeom prst="roundRect">
+            <a:avLst>
+              <a:gd name="adj" fmla="val 20000"/>
+            </a:avLst>
+          </a:prstGeom>
+          <a:solidFill>
+            <a:srgbClr val="FFFFFF"/>
+          </a:solidFill>
+          <a:ln w="12700">
+            <a:solidFill>
+              <a:srgbClr val="1E8E52"/>
+            </a:solidFill>
+            <a:prstDash val="dash"/>
+          </a:ln>
+        </p:spPr>
+        <p:txBody>
+          <a:bodyPr rtlCol="0" anchor="ctr" lIns="0" rIns="0" tIns="0" bIns="0"/>
+          <a:lstStyle/>
+          <a:p>
+            <a:pPr algn="ctr"/>
+            <a:r>
+              <a:rPr lang="en-US" sz="1000" b="1" i="0" dirty="0">
+                <a:solidFill>
+                  <a:srgbClr val="1E8E52"/>
+                </a:solidFill>
+                <a:latin typeface="Arial"/>
+                <a:cs typeface="Arial"/>
+              </a:rPr>
+              <a:t>New agent</a:t>
+            </a:r>
+          </a:p>
+        </p:txBody>
+      </p:sp>
+      <p:sp>
+        <p:nvSpPr>
+          <p:cNvPr id="52" name="roundRect 52"/>
+          <p:cNvSpPr/>
+          <p:nvPr/>
+        </p:nvSpPr>
+        <p:spPr>
+          <a:xfrm>
+            <a:off x="7452360" y="1874520"/>
+            <a:ext cx="1097280" cy="246888"/>
+          </a:xfrm>
+          <a:prstGeom prst="roundRect">
+            <a:avLst>
+              <a:gd name="adj" fmla="val 20000"/>
+            </a:avLst>
+          </a:prstGeom>
+          <a:solidFill>
+            <a:srgbClr val="FFFFFF"/>
+          </a:solidFill>
+          <a:ln>
+            <a:noFill/>
+          </a:ln>
+        </p:spPr>
+        <p:txBody>
+          <a:bodyPr rtlCol="0" anchor="ctr" lIns="0" rIns="0" tIns="0" bIns="0"/>
+          <a:lstStyle/>
+          <a:p>
+            <a:pPr algn="ctr"/>
+            <a:r>
+              <a:rPr lang="en-US" sz="1000" b="1" i="0" dirty="0">
+                <a:solidFill>
+                  <a:srgbClr val="051832"/>
+                </a:solidFill>
+                <a:latin typeface="Arial"/>
+                <a:cs typeface="Arial"/>
+              </a:rPr>
+              <a:t>GitHub</a:t>
+            </a:r>
+          </a:p>
+        </p:txBody>
+      </p:sp>
+      <p:sp>
+        <p:nvSpPr>
+          <p:cNvPr id="53" name="roundRect 53"/>
+          <p:cNvSpPr/>
+          <p:nvPr/>
+        </p:nvSpPr>
+        <p:spPr>
+          <a:xfrm>
+            <a:off x="7452360" y="2155698"/>
+            <a:ext cx="1097280" cy="246888"/>
+          </a:xfrm>
+          <a:prstGeom prst="roundRect">
+            <a:avLst>
+              <a:gd name="adj" fmla="val 20000"/>
+            </a:avLst>
+          </a:prstGeom>
+          <a:solidFill>
+            <a:srgbClr val="FFFFFF"/>
+          </a:solidFill>
+          <a:ln>
+            <a:noFill/>
+          </a:ln>
+        </p:spPr>
+        <p:txBody>
+          <a:bodyPr rtlCol="0" anchor="ctr" lIns="0" rIns="0" tIns="0" bIns="0"/>
+          <a:lstStyle/>
+          <a:p>
+            <a:pPr algn="ctr"/>
+            <a:r>
+              <a:rPr lang="en-US" sz="1000" b="1" i="0" dirty="0">
+                <a:solidFill>
+                  <a:srgbClr val="051832"/>
+                </a:solidFill>
+                <a:latin typeface="Arial"/>
+                <a:cs typeface="Arial"/>
+              </a:rPr>
+              <a:t>Jira</a:t>
+            </a:r>
+          </a:p>
+        </p:txBody>
+      </p:sp>
+      <p:sp>
+        <p:nvSpPr>
+          <p:cNvPr id="54" name="roundRect 54"/>
+          <p:cNvSpPr/>
+          <p:nvPr/>
+        </p:nvSpPr>
+        <p:spPr>
+          <a:xfrm>
+            <a:off x="7452360" y="2436876"/>
+            <a:ext cx="1097280" cy="246888"/>
+          </a:xfrm>
+          <a:prstGeom prst="roundRect">
+            <a:avLst>
+              <a:gd name="adj" fmla="val 20000"/>
+            </a:avLst>
+          </a:prstGeom>
+          <a:solidFill>
+            <a:srgbClr val="FFFFFF"/>
+          </a:solidFill>
+          <a:ln>
+            <a:noFill/>
+          </a:ln>
+        </p:spPr>
+        <p:txBody>
+          <a:bodyPr rtlCol="0" anchor="ctr" lIns="0" rIns="0" tIns="0" bIns="0"/>
+          <a:lstStyle/>
+          <a:p>
+            <a:pPr algn="ctr"/>
+            <a:r>
+              <a:rPr lang="en-US" sz="1000" b="1" i="0" dirty="0">
+                <a:solidFill>
+                  <a:srgbClr val="051832"/>
+                </a:solidFill>
+                <a:latin typeface="Arial"/>
+                <a:cs typeface="Arial"/>
+              </a:rPr>
+              <a:t>Confluence</a:t>
+            </a:r>
+          </a:p>
+        </p:txBody>
+      </p:sp>
+      <p:sp>
+        <p:nvSpPr>
+          <p:cNvPr id="55" name="roundRect 55"/>
+          <p:cNvSpPr/>
+          <p:nvPr/>
+        </p:nvSpPr>
+        <p:spPr>
+          <a:xfrm>
+            <a:off x="7452360" y="2718054"/>
+            <a:ext cx="1097280" cy="246888"/>
+          </a:xfrm>
+          <a:prstGeom prst="roundRect">
+            <a:avLst>
+              <a:gd name="adj" fmla="val 20000"/>
+            </a:avLst>
+          </a:prstGeom>
+          <a:solidFill>
+            <a:srgbClr val="FFFFFF"/>
+          </a:solidFill>
+          <a:ln>
+            <a:noFill/>
+          </a:ln>
+        </p:spPr>
+        <p:txBody>
+          <a:bodyPr rtlCol="0" anchor="ctr" lIns="0" rIns="0" tIns="0" bIns="0"/>
+          <a:lstStyle/>
+          <a:p>
+            <a:pPr algn="ctr"/>
+            <a:r>
+              <a:rPr lang="en-US" sz="1000" b="1" i="0" dirty="0">
+                <a:solidFill>
+                  <a:srgbClr val="051832"/>
+                </a:solidFill>
+                <a:latin typeface="Arial"/>
+                <a:cs typeface="Arial"/>
+              </a:rPr>
+              <a:t>ServiceNow</a:t>
+            </a:r>
+          </a:p>
+        </p:txBody>
+      </p:sp>
+      <p:sp>
+        <p:nvSpPr>
+          <p:cNvPr id="56" name="roundRect 56"/>
+          <p:cNvSpPr/>
+          <p:nvPr/>
+        </p:nvSpPr>
+        <p:spPr>
+          <a:xfrm>
+            <a:off x="7452360" y="2999232"/>
+            <a:ext cx="1097280" cy="246888"/>
+          </a:xfrm>
+          <a:prstGeom prst="roundRect">
+            <a:avLst>
+              <a:gd name="adj" fmla="val 20000"/>
+            </a:avLst>
+          </a:prstGeom>
+          <a:solidFill>
+            <a:srgbClr val="FFFFFF"/>
+          </a:solidFill>
+          <a:ln>
+            <a:noFill/>
+          </a:ln>
+        </p:spPr>
+        <p:txBody>
+          <a:bodyPr rtlCol="0" anchor="ctr" lIns="0" rIns="0" tIns="0" bIns="0"/>
+          <a:lstStyle/>
+          <a:p>
+            <a:pPr algn="ctr"/>
+            <a:r>
+              <a:rPr lang="en-US" sz="1000" b="1" i="0" dirty="0">
+                <a:solidFill>
+                  <a:srgbClr val="051832"/>
+                </a:solidFill>
+                <a:latin typeface="Arial"/>
+                <a:cs typeface="Arial"/>
+              </a:rPr>
+              <a:t>Slack</a:t>
+            </a:r>
+          </a:p>
+        </p:txBody>
+      </p:sp>
+      <p:sp>
+        <p:nvSpPr>
+          <p:cNvPr id="57" name="roundRect 57"/>
+          <p:cNvSpPr/>
+          <p:nvPr/>
+        </p:nvSpPr>
+        <p:spPr>
+          <a:xfrm>
+            <a:off x="6195060" y="1988820"/>
+            <a:ext cx="960120" cy="1143000"/>
+          </a:xfrm>
+          <a:prstGeom prst="roundRect">
+            <a:avLst>
+              <a:gd name="adj" fmla="val 12000"/>
             </a:avLst>
           </a:prstGeom>
           <a:solidFill>
@@ -18052,14 +18955,14 @@
       </p:sp>
       <p:sp>
         <p:nvSpPr>
-          <p:cNvPr id="13" name="TextBox 13"/>
+          <p:cNvPr id="58" name="TextBox 58"/>
           <p:cNvSpPr txBox="1"/>
           <p:nvPr/>
         </p:nvSpPr>
         <p:spPr>
           <a:xfrm>
-            <a:off x="6355080" y="1527048"/>
-            <a:ext cx="2103120" cy="320040"/>
+            <a:off x="6195060" y="2308860"/>
+            <a:ext cx="960120" cy="228600"/>
           </a:xfrm>
           <a:prstGeom prst="rect">
             <a:avLst/>
@@ -18067,64 +18970,35 @@
           <a:noFill/>
         </p:spPr>
         <p:txBody>
-          <a:bodyPr wrap="square" lIns="0" tIns="0" rIns="0" bIns="0" anchor="t">
+          <a:bodyPr wrap="square" lIns="0" rIns="0" tIns="0" bIns="0" anchor="t">
             <a:normAutofit/>
           </a:bodyPr>
           <a:lstStyle/>
           <a:p>
-            <a:pPr algn="l"/>
-            <a:r>
-              <a:rPr lang="en-US" sz="1500" b="1" i="0" dirty="0">
+            <a:pPr algn="ctr"/>
+            <a:r>
+              <a:rPr lang="en-US" sz="1600" b="1" i="0" dirty="0">
                 <a:solidFill>
                   <a:srgbClr val="FFFFFF"/>
                 </a:solidFill>
                 <a:latin typeface="Arial"/>
                 <a:cs typeface="Arial"/>
               </a:rPr>
-              <a:t>When MCP pays off</a:t>
-            </a:r>
-          </a:p>
-        </p:txBody>
-      </p:sp>
-      <p:sp>
-        <p:nvSpPr>
-          <p:cNvPr id="14" name="ellipse 14"/>
-          <p:cNvSpPr/>
-          <p:nvPr/>
-        </p:nvSpPr>
-        <p:spPr>
-          <a:xfrm>
-            <a:off x="6355080" y="2075688"/>
-            <a:ext cx="128016" cy="128016"/>
-          </a:xfrm>
-          <a:prstGeom prst="ellipse">
-            <a:avLst/>
-          </a:prstGeom>
-          <a:solidFill>
-            <a:srgbClr val="01B1EA"/>
-          </a:solidFill>
-          <a:ln>
-            <a:noFill/>
-          </a:ln>
-        </p:spPr>
-        <p:txBody>
-          <a:bodyPr/>
-          <a:lstStyle/>
-          <a:p>
-            <a:endParaRPr lang="en-US"/>
-          </a:p>
-        </p:txBody>
-      </p:sp>
-      <p:sp>
-        <p:nvSpPr>
-          <p:cNvPr id="15" name="TextBox 15"/>
+              <a:t>MCP</a:t>
+            </a:r>
+          </a:p>
+        </p:txBody>
+      </p:sp>
+      <p:sp>
+        <p:nvSpPr>
+          <p:cNvPr id="59" name="TextBox 59"/>
           <p:cNvSpPr txBox="1"/>
           <p:nvPr/>
         </p:nvSpPr>
         <p:spPr>
           <a:xfrm>
-            <a:off x="6601968" y="2020824"/>
-            <a:ext cx="1856232" cy="502920"/>
+            <a:off x="6240780" y="2583180"/>
+            <a:ext cx="868680" cy="457200"/>
           </a:xfrm>
           <a:prstGeom prst="rect">
             <a:avLst/>
@@ -18132,64 +19006,48 @@
           <a:noFill/>
         </p:spPr>
         <p:txBody>
-          <a:bodyPr wrap="square" lIns="0" tIns="0" rIns="0" bIns="0" anchor="t">
+          <a:bodyPr wrap="square" lIns="0" rIns="0" tIns="0" bIns="0" anchor="t">
             <a:normAutofit/>
           </a:bodyPr>
           <a:lstStyle/>
           <a:p>
-            <a:pPr algn="l"/>
-            <a:r>
-              <a:rPr lang="en-US" sz="1200" b="0" i="0" dirty="0">
-                <a:solidFill>
-                  <a:srgbClr val="FFFFFF"/>
+            <a:pPr algn="ctr"/>
+            <a:r>
+              <a:rPr lang="en-US" sz="900" b="1" i="0" dirty="0">
+                <a:solidFill>
+                  <a:srgbClr val="01B1EA"/>
                 </a:solidFill>
                 <a:latin typeface="Arial"/>
                 <a:cs typeface="Arial"/>
               </a:rPr>
-              <a:t>Several AI apps or agents share one system</a:t>
-            </a:r>
-          </a:p>
-        </p:txBody>
-      </p:sp>
-      <p:sp>
-        <p:nvSpPr>
-          <p:cNvPr id="16" name="ellipse 16"/>
-          <p:cNvSpPr/>
-          <p:nvPr/>
-        </p:nvSpPr>
-        <p:spPr>
-          <a:xfrm>
-            <a:off x="6355080" y="2642616"/>
-            <a:ext cx="128016" cy="128016"/>
-          </a:xfrm>
-          <a:prstGeom prst="ellipse">
-            <a:avLst/>
-          </a:prstGeom>
-          <a:solidFill>
-            <a:srgbClr val="01B1EA"/>
-          </a:solidFill>
-          <a:ln>
-            <a:noFill/>
-          </a:ln>
-        </p:spPr>
-        <p:txBody>
-          <a:bodyPr/>
-          <a:lstStyle/>
-          <a:p>
-            <a:endParaRPr lang="en-US"/>
-          </a:p>
-        </p:txBody>
-      </p:sp>
-      <p:sp>
-        <p:nvSpPr>
-          <p:cNvPr id="17" name="TextBox 17"/>
+              <a:t>one endpoint</a:t>
+            </a:r>
+          </a:p>
+          <a:p>
+            <a:pPr algn="ctr"/>
+            <a:r>
+              <a:rPr lang="en-US" sz="900" b="1" i="0" dirty="0">
+                <a:solidFill>
+                  <a:srgbClr val="01B1EA"/>
+                </a:solidFill>
+                <a:latin typeface="Arial"/>
+                <a:cs typeface="Arial"/>
+              </a:rPr>
+              <a:t>one sign-in</a:t>
+            </a:r>
+          </a:p>
+        </p:txBody>
+      </p:sp>
+      <p:sp>
+        <p:nvSpPr>
+          <p:cNvPr id="60" name="TextBox 60"/>
           <p:cNvSpPr txBox="1"/>
           <p:nvPr/>
         </p:nvSpPr>
         <p:spPr>
           <a:xfrm>
-            <a:off x="6601968" y="2587752"/>
-            <a:ext cx="1856232" cy="502920"/>
+            <a:off x="4800600" y="3291840"/>
+            <a:ext cx="1280160" cy="182880"/>
           </a:xfrm>
           <a:prstGeom prst="rect">
             <a:avLst/>
@@ -18197,64 +19055,35 @@
           <a:noFill/>
         </p:spPr>
         <p:txBody>
-          <a:bodyPr wrap="square" lIns="0" tIns="0" rIns="0" bIns="0" anchor="t">
+          <a:bodyPr wrap="square" lIns="0" rIns="0" tIns="0" bIns="0" anchor="t">
             <a:normAutofit/>
           </a:bodyPr>
           <a:lstStyle/>
           <a:p>
             <a:pPr algn="l"/>
             <a:r>
-              <a:rPr lang="en-US" sz="1200" b="0" i="0" dirty="0">
-                <a:solidFill>
-                  <a:srgbClr val="FFFFFF"/>
+              <a:rPr lang="en-US" sz="900" b="1" i="0" dirty="0">
+                <a:solidFill>
+                  <a:srgbClr val="1E8E52"/>
                 </a:solidFill>
                 <a:latin typeface="Arial"/>
                 <a:cs typeface="Arial"/>
               </a:rPr>
-              <a:t>Callers have different permissions</a:t>
-            </a:r>
-          </a:p>
-        </p:txBody>
-      </p:sp>
-      <p:sp>
-        <p:nvSpPr>
-          <p:cNvPr id="18" name="ellipse 18"/>
-          <p:cNvSpPr/>
-          <p:nvPr/>
-        </p:nvSpPr>
-        <p:spPr>
-          <a:xfrm>
-            <a:off x="6355080" y="3209544"/>
-            <a:ext cx="128016" cy="128016"/>
-          </a:xfrm>
-          <a:prstGeom prst="ellipse">
-            <a:avLst/>
-          </a:prstGeom>
-          <a:solidFill>
-            <a:srgbClr val="01B1EA"/>
-          </a:solidFill>
-          <a:ln>
-            <a:noFill/>
-          </a:ln>
-        </p:spPr>
-        <p:txBody>
-          <a:bodyPr/>
-          <a:lstStyle/>
-          <a:p>
-            <a:endParaRPr lang="en-US"/>
-          </a:p>
-        </p:txBody>
-      </p:sp>
-      <p:sp>
-        <p:nvSpPr>
-          <p:cNvPr id="19" name="TextBox 19"/>
+              <a:t>+1 connection</a:t>
+            </a:r>
+          </a:p>
+        </p:txBody>
+      </p:sp>
+      <p:sp>
+        <p:nvSpPr>
+          <p:cNvPr id="61" name="TextBox 61"/>
           <p:cNvSpPr txBox="1"/>
           <p:nvPr/>
         </p:nvSpPr>
         <p:spPr>
           <a:xfrm>
-            <a:off x="6601968" y="3154680"/>
-            <a:ext cx="1856232" cy="502920"/>
+            <a:off x="457200" y="4041648"/>
+            <a:ext cx="8229600" cy="320040"/>
           </a:xfrm>
           <a:prstGeom prst="rect">
             <a:avLst/>
@@ -18262,57 +19091,21 @@
           <a:noFill/>
         </p:spPr>
         <p:txBody>
-          <a:bodyPr wrap="square" lIns="0" tIns="0" rIns="0" bIns="0" anchor="t">
+          <a:bodyPr wrap="square" lIns="0" rIns="0" tIns="0" bIns="0" anchor="t">
             <a:normAutofit/>
           </a:bodyPr>
           <a:lstStyle/>
           <a:p>
             <a:pPr algn="l"/>
             <a:r>
-              <a:rPr lang="en-US" sz="1200" b="0" i="0" dirty="0">
-                <a:solidFill>
-                  <a:srgbClr val="FFFFFF"/>
+              <a:rPr lang="en-US" sz="1400" b="1" i="0" dirty="0">
+                <a:solidFill>
+                  <a:srgbClr val="051832"/>
                 </a:solidFill>
                 <a:latin typeface="Arial"/>
                 <a:cs typeface="Arial"/>
               </a:rPr>
-              <a:t>You must prove who did what</a:t>
-            </a:r>
-          </a:p>
-        </p:txBody>
-      </p:sp>
-      <p:sp>
-        <p:nvSpPr>
-          <p:cNvPr id="20" name="TextBox 20"/>
-          <p:cNvSpPr txBox="1"/>
-          <p:nvPr/>
-        </p:nvSpPr>
-        <p:spPr>
-          <a:xfrm>
-            <a:off x="457200" y="4041648"/>
-            <a:ext cx="8229600" cy="320040"/>
-          </a:xfrm>
-          <a:prstGeom prst="rect">
-            <a:avLst/>
-          </a:prstGeom>
-          <a:noFill/>
-        </p:spPr>
-        <p:txBody>
-          <a:bodyPr wrap="square" lIns="0" tIns="0" rIns="0" bIns="0" anchor="t">
-            <a:normAutofit/>
-          </a:bodyPr>
-          <a:lstStyle/>
-          <a:p>
-            <a:pPr algn="l"/>
-            <a:r>
-              <a:rPr lang="en-US" sz="1400" b="1" i="0" dirty="0">
-                <a:solidFill>
-                  <a:srgbClr val="051832"/>
-                </a:solidFill>
-                <a:latin typeface="Arial"/>
-                <a:cs typeface="Arial"/>
-              </a:rPr>
-              <a:t>One app of yours calling one API? </a:t>
+              <a:t xml:space="preserve">One app of yours calling one API? </a:t>
             </a:r>
             <a:r>
               <a:rPr lang="en-US" sz="1400" b="0" i="0" dirty="0">
